--- a/docs/assets/deck/verdict-bench.pptx
+++ b/docs/assets/deck/verdict-bench.pptx
@@ -27,7 +27,6 @@
     <p:sldId id="275" r:id="rId26"/>
     <p:sldId id="276" r:id="rId27"/>
     <p:sldId id="277" r:id="rId28"/>
-    <p:sldId id="278" r:id="rId29"/>
   </p:sldIdLst>
   <p:sldSz cx="12191695" cy="6858000" type="screen4x3"/>
   <p:notesSz cx="6858000" cy="9144000"/>
@@ -3273,7 +3272,7 @@
                 </a:solidFill>
                 <a:latin typeface="Inter"/>
               </a:rPr>
-              <a:t>PPDAC · PLAN · THE MACHINE</a:t>
+              <a:t>PPDAC · DATA</a:t>
             </a:r>
           </a:p>
         </p:txBody>
@@ -3312,797 +3311,44 @@
                 </a:solidFill>
                 <a:latin typeface="Inter"/>
               </a:rPr>
-              <a:t>One pipeline, every claim traceable to a run</a:t>
-            </a:r>
-          </a:p>
-        </p:txBody>
-      </p:sp>
-      <p:sp>
-        <p:nvSpPr>
-          <p:cNvPr id="4" name="Rounded Rectangle 3"/>
-          <p:cNvSpPr/>
-          <p:nvPr/>
-        </p:nvSpPr>
-        <p:spPr>
-          <a:xfrm>
-            <a:off x="822960" y="2103120"/>
-            <a:ext cx="2103120" cy="914400"/>
-          </a:xfrm>
-          <a:prstGeom prst="roundRect">
-            <a:avLst/>
-          </a:prstGeom>
-          <a:solidFill>
-            <a:srgbClr val="111420"/>
-          </a:solidFill>
-          <a:ln w="15240">
-            <a:solidFill>
-              <a:srgbClr val="3A3F4E"/>
-            </a:solidFill>
-          </a:ln>
-          <a:effectLst/>
-        </p:spPr>
-        <p:style>
-          <a:lnRef idx="1">
-            <a:schemeClr val="accent1"/>
-          </a:lnRef>
-          <a:fillRef idx="3">
-            <a:schemeClr val="accent1"/>
-          </a:fillRef>
-          <a:effectRef idx="2">
-            <a:schemeClr val="accent1"/>
-          </a:effectRef>
-          <a:fontRef idx="minor">
-            <a:schemeClr val="lt1"/>
-          </a:fontRef>
-        </p:style>
-        <p:txBody>
-          <a:bodyPr rtlCol="0" anchor="ctr" wrap="square"/>
-          <a:lstStyle/>
-          <a:p>
-            <a:pPr algn="ctr">
-              <a:spcAft>
-                <a:spcPts val="200"/>
-              </a:spcAft>
-            </a:pPr>
-            <a:r>
-              <a:rPr sz="1300" b="1">
-                <a:solidFill>
-                  <a:srgbClr val="E8ECF4"/>
-                </a:solidFill>
-                <a:latin typeface="Inter"/>
-              </a:rPr>
-              <a:t>89 labeled cases</a:t>
-            </a:r>
-          </a:p>
-          <a:p>
-            <a:pPr>
-              <a:spcAft>
-                <a:spcPts val="0"/>
-              </a:spcAft>
-            </a:pPr>
-            <a:r>
-              <a:rPr sz="1000" b="0">
-                <a:solidFill>
-                  <a:srgbClr val="8A93A3"/>
-                </a:solidFill>
-                <a:latin typeface="Inter"/>
-              </a:rPr>
-              <a:t>+ POLICY.md, frozen</a:t>
-            </a:r>
-          </a:p>
-        </p:txBody>
-      </p:sp>
-      <p:sp>
-        <p:nvSpPr>
-          <p:cNvPr id="5" name="Rounded Rectangle 4"/>
-          <p:cNvSpPr/>
-          <p:nvPr/>
-        </p:nvSpPr>
-        <p:spPr>
-          <a:xfrm>
-            <a:off x="822960" y="3474720"/>
-            <a:ext cx="2103120" cy="914400"/>
-          </a:xfrm>
-          <a:prstGeom prst="roundRect">
-            <a:avLst/>
-          </a:prstGeom>
-          <a:solidFill>
-            <a:srgbClr val="111420"/>
-          </a:solidFill>
-          <a:ln w="15240">
-            <a:solidFill>
-              <a:srgbClr val="3A3F4E"/>
-            </a:solidFill>
-          </a:ln>
-          <a:effectLst/>
-        </p:spPr>
-        <p:style>
-          <a:lnRef idx="1">
-            <a:schemeClr val="accent1"/>
-          </a:lnRef>
-          <a:fillRef idx="3">
-            <a:schemeClr val="accent1"/>
-          </a:fillRef>
-          <a:effectRef idx="2">
-            <a:schemeClr val="accent1"/>
-          </a:effectRef>
-          <a:fontRef idx="minor">
-            <a:schemeClr val="lt1"/>
-          </a:fontRef>
-        </p:style>
-        <p:txBody>
-          <a:bodyPr rtlCol="0" anchor="ctr" wrap="square"/>
-          <a:lstStyle/>
-          <a:p>
-            <a:pPr algn="ctr">
-              <a:spcAft>
-                <a:spcPts val="200"/>
-              </a:spcAft>
-            </a:pPr>
-            <a:r>
-              <a:rPr sz="1300" b="1">
-                <a:solidFill>
-                  <a:srgbClr val="E8ECF4"/>
-                </a:solidFill>
-                <a:latin typeface="Inter"/>
-              </a:rPr>
-              <a:t>prompt ladder</a:t>
-            </a:r>
-          </a:p>
-          <a:p>
-            <a:pPr>
-              <a:spcAft>
-                <a:spcPts val="0"/>
-              </a:spcAft>
-            </a:pPr>
-            <a:r>
-              <a:rPr sz="1000" b="0">
-                <a:solidFill>
-                  <a:srgbClr val="8A93A3"/>
-                </a:solidFill>
-                <a:latin typeface="Inter"/>
-              </a:rPr>
-              <a:t>v1..v5, one change per rung</a:t>
-            </a:r>
-          </a:p>
-        </p:txBody>
-      </p:sp>
-      <p:sp>
-        <p:nvSpPr>
-          <p:cNvPr id="6" name="Rounded Rectangle 5"/>
-          <p:cNvSpPr/>
-          <p:nvPr/>
-        </p:nvSpPr>
-        <p:spPr>
-          <a:xfrm>
-            <a:off x="3474720" y="2788920"/>
-            <a:ext cx="2103120" cy="914400"/>
-          </a:xfrm>
-          <a:prstGeom prst="roundRect">
-            <a:avLst/>
-          </a:prstGeom>
-          <a:solidFill>
-            <a:srgbClr val="111420"/>
-          </a:solidFill>
-          <a:ln w="15240">
-            <a:solidFill>
-              <a:srgbClr val="828FFF"/>
-            </a:solidFill>
-          </a:ln>
-          <a:effectLst/>
-        </p:spPr>
-        <p:style>
-          <a:lnRef idx="1">
-            <a:schemeClr val="accent1"/>
-          </a:lnRef>
-          <a:fillRef idx="3">
-            <a:schemeClr val="accent1"/>
-          </a:fillRef>
-          <a:effectRef idx="2">
-            <a:schemeClr val="accent1"/>
-          </a:effectRef>
-          <a:fontRef idx="minor">
-            <a:schemeClr val="lt1"/>
-          </a:fontRef>
-        </p:style>
-        <p:txBody>
-          <a:bodyPr rtlCol="0" anchor="ctr" wrap="square"/>
-          <a:lstStyle/>
-          <a:p>
-            <a:pPr algn="ctr">
-              <a:spcAft>
-                <a:spcPts val="200"/>
-              </a:spcAft>
-            </a:pPr>
-            <a:r>
-              <a:rPr sz="1300" b="1">
-                <a:solidFill>
-                  <a:srgbClr val="E8ECF4"/>
-                </a:solidFill>
-                <a:latin typeface="Inter"/>
-              </a:rPr>
-              <a:t>runner</a:t>
-            </a:r>
-          </a:p>
-          <a:p>
-            <a:pPr>
-              <a:spcAft>
-                <a:spcPts val="0"/>
-              </a:spcAft>
-            </a:pPr>
-            <a:r>
-              <a:rPr sz="1000" b="0">
-                <a:solidFill>
-                  <a:srgbClr val="8A93A3"/>
-                </a:solidFill>
-                <a:latin typeface="Inter"/>
-              </a:rPr>
-              <a:t>7 providers, N=5 repeats</a:t>
-            </a:r>
-          </a:p>
-        </p:txBody>
-      </p:sp>
-      <p:sp>
-        <p:nvSpPr>
-          <p:cNvPr id="7" name="Rounded Rectangle 6"/>
-          <p:cNvSpPr/>
-          <p:nvPr/>
-        </p:nvSpPr>
-        <p:spPr>
-          <a:xfrm>
-            <a:off x="6126480" y="2788920"/>
-            <a:ext cx="2103120" cy="914400"/>
-          </a:xfrm>
-          <a:prstGeom prst="roundRect">
-            <a:avLst/>
-          </a:prstGeom>
-          <a:solidFill>
-            <a:srgbClr val="111420"/>
-          </a:solidFill>
-          <a:ln w="15240">
-            <a:solidFill>
-              <a:srgbClr val="CFA36C"/>
-            </a:solidFill>
-          </a:ln>
-          <a:effectLst/>
-        </p:spPr>
-        <p:style>
-          <a:lnRef idx="1">
-            <a:schemeClr val="accent1"/>
-          </a:lnRef>
-          <a:fillRef idx="3">
-            <a:schemeClr val="accent1"/>
-          </a:fillRef>
-          <a:effectRef idx="2">
-            <a:schemeClr val="accent1"/>
-          </a:effectRef>
-          <a:fontRef idx="minor">
-            <a:schemeClr val="lt1"/>
-          </a:fontRef>
-        </p:style>
-        <p:txBody>
-          <a:bodyPr rtlCol="0" anchor="ctr" wrap="square"/>
-          <a:lstStyle/>
-          <a:p>
-            <a:pPr algn="ctr">
-              <a:spcAft>
-                <a:spcPts val="200"/>
-              </a:spcAft>
-            </a:pPr>
-            <a:r>
-              <a:rPr sz="1300" b="1">
-                <a:solidFill>
-                  <a:srgbClr val="E8ECF4"/>
-                </a:solidFill>
-                <a:latin typeface="Inter"/>
-              </a:rPr>
-              <a:t>sqlite ledger</a:t>
-            </a:r>
-          </a:p>
-          <a:p>
-            <a:pPr>
-              <a:spcAft>
-                <a:spcPts val="0"/>
-              </a:spcAft>
-            </a:pPr>
-            <a:r>
-              <a:rPr sz="1000" b="0">
-                <a:solidFill>
-                  <a:srgbClr val="8A93A3"/>
-                </a:solidFill>
-                <a:latin typeface="Inter"/>
-              </a:rPr>
-              <a:t>every run, hash-pinned</a:t>
-            </a:r>
-          </a:p>
-        </p:txBody>
-      </p:sp>
-      <p:sp>
-        <p:nvSpPr>
-          <p:cNvPr id="8" name="Rounded Rectangle 7"/>
-          <p:cNvSpPr/>
-          <p:nvPr/>
-        </p:nvSpPr>
-        <p:spPr>
-          <a:xfrm>
-            <a:off x="3474720" y="4297680"/>
-            <a:ext cx="2103120" cy="914400"/>
-          </a:xfrm>
-          <a:prstGeom prst="roundRect">
-            <a:avLst/>
-          </a:prstGeom>
-          <a:solidFill>
-            <a:srgbClr val="111420"/>
-          </a:solidFill>
-          <a:ln w="15240">
-            <a:solidFill>
-              <a:srgbClr val="4ADE80"/>
-            </a:solidFill>
-          </a:ln>
-          <a:effectLst/>
-        </p:spPr>
-        <p:style>
-          <a:lnRef idx="1">
-            <a:schemeClr val="accent1"/>
-          </a:lnRef>
-          <a:fillRef idx="3">
-            <a:schemeClr val="accent1"/>
-          </a:fillRef>
-          <a:effectRef idx="2">
-            <a:schemeClr val="accent1"/>
-          </a:effectRef>
-          <a:fontRef idx="minor">
-            <a:schemeClr val="lt1"/>
-          </a:fontRef>
-        </p:style>
-        <p:txBody>
-          <a:bodyPr rtlCol="0" anchor="ctr" wrap="square"/>
-          <a:lstStyle/>
-          <a:p>
-            <a:pPr algn="ctr">
-              <a:spcAft>
-                <a:spcPts val="200"/>
-              </a:spcAft>
-            </a:pPr>
-            <a:r>
-              <a:rPr sz="1300" b="1">
-                <a:solidFill>
-                  <a:srgbClr val="E8ECF4"/>
-                </a:solidFill>
-                <a:latin typeface="Inter"/>
-              </a:rPr>
-              <a:t>trust gates</a:t>
-            </a:r>
-          </a:p>
-          <a:p>
-            <a:pPr>
-              <a:spcAft>
-                <a:spcPts val="0"/>
-              </a:spcAft>
-            </a:pPr>
-            <a:r>
-              <a:rPr sz="1000" b="0">
-                <a:solidFill>
-                  <a:srgbClr val="8A93A3"/>
-                </a:solidFill>
-                <a:latin typeface="Inter"/>
-              </a:rPr>
-              <a:t>n, contract, CI, flip, tripwire</a:t>
-            </a:r>
-          </a:p>
-        </p:txBody>
-      </p:sp>
-      <p:sp>
-        <p:nvSpPr>
-          <p:cNvPr id="9" name="Rounded Rectangle 8"/>
-          <p:cNvSpPr/>
-          <p:nvPr/>
-        </p:nvSpPr>
-        <p:spPr>
-          <a:xfrm>
-            <a:off x="6126480" y="4297680"/>
-            <a:ext cx="2103120" cy="914400"/>
-          </a:xfrm>
-          <a:prstGeom prst="roundRect">
-            <a:avLst/>
-          </a:prstGeom>
-          <a:solidFill>
-            <a:srgbClr val="111420"/>
-          </a:solidFill>
-          <a:ln w="15240">
-            <a:solidFill>
-              <a:srgbClr val="3A3F4E"/>
-            </a:solidFill>
-          </a:ln>
-          <a:effectLst/>
-        </p:spPr>
-        <p:style>
-          <a:lnRef idx="1">
-            <a:schemeClr val="accent1"/>
-          </a:lnRef>
-          <a:fillRef idx="3">
-            <a:schemeClr val="accent1"/>
-          </a:fillRef>
-          <a:effectRef idx="2">
-            <a:schemeClr val="accent1"/>
-          </a:effectRef>
-          <a:fontRef idx="minor">
-            <a:schemeClr val="lt1"/>
-          </a:fontRef>
-        </p:style>
-        <p:txBody>
-          <a:bodyPr rtlCol="0" anchor="ctr" wrap="square"/>
-          <a:lstStyle/>
-          <a:p>
-            <a:pPr algn="ctr">
-              <a:spcAft>
-                <a:spcPts val="200"/>
-              </a:spcAft>
-            </a:pPr>
-            <a:r>
-              <a:rPr sz="1300" b="1">
-                <a:solidFill>
-                  <a:srgbClr val="E8ECF4"/>
-                </a:solidFill>
-                <a:latin typeface="Inter"/>
-              </a:rPr>
-              <a:t>export</a:t>
-            </a:r>
-          </a:p>
-          <a:p>
-            <a:pPr>
-              <a:spcAft>
-                <a:spcPts val="0"/>
-              </a:spcAft>
-            </a:pPr>
-            <a:r>
-              <a:rPr sz="1000" b="0">
-                <a:solidFill>
-                  <a:srgbClr val="8A93A3"/>
-                </a:solidFill>
-                <a:latin typeface="Inter"/>
-              </a:rPr>
-              <a:t>benchmark.json, differential-tested</a:t>
-            </a:r>
-          </a:p>
-        </p:txBody>
-      </p:sp>
-      <p:sp>
-        <p:nvSpPr>
-          <p:cNvPr id="10" name="Rounded Rectangle 9"/>
-          <p:cNvSpPr/>
-          <p:nvPr/>
-        </p:nvSpPr>
-        <p:spPr>
-          <a:xfrm>
-            <a:off x="8961120" y="3474720"/>
-            <a:ext cx="2103120" cy="1097280"/>
-          </a:xfrm>
-          <a:prstGeom prst="roundRect">
-            <a:avLst/>
-          </a:prstGeom>
-          <a:solidFill>
-            <a:srgbClr val="111420"/>
-          </a:solidFill>
-          <a:ln w="15240">
-            <a:solidFill>
-              <a:srgbClr val="3A3F4E"/>
-            </a:solidFill>
-          </a:ln>
-          <a:effectLst/>
-        </p:spPr>
-        <p:style>
-          <a:lnRef idx="1">
-            <a:schemeClr val="accent1"/>
-          </a:lnRef>
-          <a:fillRef idx="3">
-            <a:schemeClr val="accent1"/>
-          </a:fillRef>
-          <a:effectRef idx="2">
-            <a:schemeClr val="accent1"/>
-          </a:effectRef>
-          <a:fontRef idx="minor">
-            <a:schemeClr val="lt1"/>
-          </a:fontRef>
-        </p:style>
-        <p:txBody>
-          <a:bodyPr rtlCol="0" anchor="ctr" wrap="square"/>
-          <a:lstStyle/>
-          <a:p>
-            <a:pPr algn="ctr">
-              <a:spcAft>
-                <a:spcPts val="200"/>
-              </a:spcAft>
-            </a:pPr>
-            <a:r>
-              <a:rPr sz="1300" b="1">
-                <a:solidFill>
-                  <a:srgbClr val="E8ECF4"/>
-                </a:solidFill>
-                <a:latin typeface="Inter"/>
-              </a:rPr>
-              <a:t>surfaces</a:t>
-            </a:r>
-          </a:p>
-          <a:p>
-            <a:pPr>
-              <a:spcAft>
-                <a:spcPts val="0"/>
-              </a:spcAft>
-            </a:pPr>
-            <a:r>
-              <a:rPr sz="1000" b="0">
-                <a:solidFill>
-                  <a:srgbClr val="8A93A3"/>
-                </a:solidFill>
-                <a:latin typeface="Inter"/>
-              </a:rPr>
-              <a:t>site · notebook · deck · this room</a:t>
-            </a:r>
-          </a:p>
-        </p:txBody>
-      </p:sp>
-      <p:cxnSp>
-        <p:nvCxnSpPr>
-          <p:cNvPr id="11" name="Connector 10"/>
-          <p:cNvCxnSpPr/>
-          <p:nvPr/>
-        </p:nvCxnSpPr>
-        <p:spPr>
-          <a:xfrm>
-            <a:off x="2926080" y="2651760"/>
-            <a:ext cx="548640" cy="411480"/>
-          </a:xfrm>
-          <a:prstGeom prst="line">
-            <a:avLst/>
-          </a:prstGeom>
-          <a:ln w="20320">
-            <a:solidFill>
-              <a:srgbClr val="828FFF"/>
-            </a:solidFill>
-            <a:tailEnd type="triangle" w="med" len="med"/>
-          </a:ln>
-        </p:spPr>
-        <p:style>
-          <a:lnRef idx="2">
-            <a:schemeClr val="accent1"/>
-          </a:lnRef>
-          <a:fillRef idx="0">
-            <a:schemeClr val="accent1"/>
-          </a:fillRef>
-          <a:effectRef idx="1">
-            <a:schemeClr val="accent1"/>
-          </a:effectRef>
-          <a:fontRef idx="minor">
-            <a:schemeClr val="tx1"/>
-          </a:fontRef>
-        </p:style>
-      </p:cxnSp>
-      <p:cxnSp>
-        <p:nvCxnSpPr>
-          <p:cNvPr id="12" name="Connector 11"/>
-          <p:cNvCxnSpPr/>
-          <p:nvPr/>
-        </p:nvCxnSpPr>
-        <p:spPr>
-          <a:xfrm flipV="1">
-            <a:off x="2926080" y="3429000"/>
-            <a:ext cx="548640" cy="411480"/>
-          </a:xfrm>
-          <a:prstGeom prst="line">
-            <a:avLst/>
-          </a:prstGeom>
-          <a:ln w="20320">
-            <a:solidFill>
-              <a:srgbClr val="828FFF"/>
-            </a:solidFill>
-            <a:tailEnd type="triangle" w="med" len="med"/>
-          </a:ln>
-        </p:spPr>
-        <p:style>
-          <a:lnRef idx="2">
-            <a:schemeClr val="accent1"/>
-          </a:lnRef>
-          <a:fillRef idx="0">
-            <a:schemeClr val="accent1"/>
-          </a:fillRef>
-          <a:effectRef idx="1">
-            <a:schemeClr val="accent1"/>
-          </a:effectRef>
-          <a:fontRef idx="minor">
-            <a:schemeClr val="tx1"/>
-          </a:fontRef>
-        </p:style>
-      </p:cxnSp>
-      <p:cxnSp>
-        <p:nvCxnSpPr>
-          <p:cNvPr id="13" name="Connector 12"/>
-          <p:cNvCxnSpPr/>
-          <p:nvPr/>
-        </p:nvCxnSpPr>
-        <p:spPr>
-          <a:xfrm>
-            <a:off x="5577840" y="3246120"/>
-            <a:ext cx="548640" cy="0"/>
-          </a:xfrm>
-          <a:prstGeom prst="line">
-            <a:avLst/>
-          </a:prstGeom>
-          <a:ln w="20320">
-            <a:solidFill>
-              <a:srgbClr val="828FFF"/>
-            </a:solidFill>
-            <a:tailEnd type="triangle" w="med" len="med"/>
-          </a:ln>
-        </p:spPr>
-        <p:style>
-          <a:lnRef idx="2">
-            <a:schemeClr val="accent1"/>
-          </a:lnRef>
-          <a:fillRef idx="0">
-            <a:schemeClr val="accent1"/>
-          </a:fillRef>
-          <a:effectRef idx="1">
-            <a:schemeClr val="accent1"/>
-          </a:effectRef>
-          <a:fontRef idx="minor">
-            <a:schemeClr val="tx1"/>
-          </a:fontRef>
-        </p:style>
-      </p:cxnSp>
-      <p:cxnSp>
-        <p:nvCxnSpPr>
-          <p:cNvPr id="14" name="Connector 13"/>
-          <p:cNvCxnSpPr/>
-          <p:nvPr/>
-        </p:nvCxnSpPr>
-        <p:spPr>
-          <a:xfrm flipH="1">
-            <a:off x="5669280" y="3703320"/>
-            <a:ext cx="1097280" cy="640080"/>
-          </a:xfrm>
-          <a:prstGeom prst="line">
-            <a:avLst/>
-          </a:prstGeom>
-          <a:ln w="20320">
-            <a:solidFill>
-              <a:srgbClr val="828FFF"/>
-            </a:solidFill>
-            <a:tailEnd type="triangle" w="med" len="med"/>
-          </a:ln>
-        </p:spPr>
-        <p:style>
-          <a:lnRef idx="2">
-            <a:schemeClr val="accent1"/>
-          </a:lnRef>
-          <a:fillRef idx="0">
-            <a:schemeClr val="accent1"/>
-          </a:fillRef>
-          <a:effectRef idx="1">
-            <a:schemeClr val="accent1"/>
-          </a:effectRef>
-          <a:fontRef idx="minor">
-            <a:schemeClr val="tx1"/>
-          </a:fontRef>
-        </p:style>
-      </p:cxnSp>
-      <p:cxnSp>
-        <p:nvCxnSpPr>
-          <p:cNvPr id="15" name="Connector 14"/>
-          <p:cNvCxnSpPr/>
-          <p:nvPr/>
-        </p:nvCxnSpPr>
-        <p:spPr>
-          <a:xfrm>
-            <a:off x="5577840" y="4754880"/>
-            <a:ext cx="548640" cy="0"/>
-          </a:xfrm>
-          <a:prstGeom prst="line">
-            <a:avLst/>
-          </a:prstGeom>
-          <a:ln w="20320">
-            <a:solidFill>
-              <a:srgbClr val="828FFF"/>
-            </a:solidFill>
-            <a:tailEnd type="triangle" w="med" len="med"/>
-          </a:ln>
-        </p:spPr>
-        <p:style>
-          <a:lnRef idx="2">
-            <a:schemeClr val="accent1"/>
-          </a:lnRef>
-          <a:fillRef idx="0">
-            <a:schemeClr val="accent1"/>
-          </a:fillRef>
-          <a:effectRef idx="1">
-            <a:schemeClr val="accent1"/>
-          </a:effectRef>
-          <a:fontRef idx="minor">
-            <a:schemeClr val="tx1"/>
-          </a:fontRef>
-        </p:style>
-      </p:cxnSp>
-      <p:cxnSp>
-        <p:nvCxnSpPr>
-          <p:cNvPr id="16" name="Connector 15"/>
-          <p:cNvCxnSpPr/>
-          <p:nvPr/>
-        </p:nvCxnSpPr>
-        <p:spPr>
-          <a:xfrm flipV="1">
-            <a:off x="8229600" y="4206240"/>
-            <a:ext cx="777240" cy="457200"/>
-          </a:xfrm>
-          <a:prstGeom prst="line">
-            <a:avLst/>
-          </a:prstGeom>
-          <a:ln w="20320">
-            <a:solidFill>
-              <a:srgbClr val="828FFF"/>
-            </a:solidFill>
-            <a:tailEnd type="triangle" w="med" len="med"/>
-          </a:ln>
-        </p:spPr>
-        <p:style>
-          <a:lnRef idx="2">
-            <a:schemeClr val="accent1"/>
-          </a:lnRef>
-          <a:fillRef idx="0">
-            <a:schemeClr val="accent1"/>
-          </a:fillRef>
-          <a:effectRef idx="1">
-            <a:schemeClr val="accent1"/>
-          </a:effectRef>
-          <a:fontRef idx="minor">
-            <a:schemeClr val="tx1"/>
-          </a:fontRef>
-        </p:style>
-      </p:cxnSp>
-      <p:cxnSp>
-        <p:nvCxnSpPr>
-          <p:cNvPr id="17" name="Connector 16"/>
-          <p:cNvCxnSpPr/>
-          <p:nvPr/>
-        </p:nvCxnSpPr>
-        <p:spPr>
-          <a:xfrm>
-            <a:off x="8229600" y="3154680"/>
-            <a:ext cx="777240" cy="502920"/>
-          </a:xfrm>
-          <a:prstGeom prst="line">
-            <a:avLst/>
-          </a:prstGeom>
-          <a:ln w="20320">
-            <a:solidFill>
-              <a:srgbClr val="828FFF"/>
-            </a:solidFill>
-            <a:tailEnd type="triangle" w="med" len="med"/>
-          </a:ln>
-        </p:spPr>
-        <p:style>
-          <a:lnRef idx="2">
-            <a:schemeClr val="accent1"/>
-          </a:lnRef>
-          <a:fillRef idx="0">
-            <a:schemeClr val="accent1"/>
-          </a:fillRef>
-          <a:effectRef idx="1">
-            <a:schemeClr val="accent1"/>
-          </a:effectRef>
-          <a:fontRef idx="minor">
-            <a:schemeClr val="tx1"/>
-          </a:fontRef>
-        </p:style>
-      </p:cxnSp>
-      <p:sp>
-        <p:nvSpPr>
-          <p:cNvPr id="18" name="TextBox 17"/>
+              <a:t>89 labeled cases, five suites, tiers kept apart</a:t>
+            </a:r>
+          </a:p>
+        </p:txBody>
+      </p:sp>
+      <p:pic>
+        <p:nvPicPr>
+          <p:cNvPr id="4" name="Picture 3" descr="eda_corpus.png"/>
+          <p:cNvPicPr>
+            <a:picLocks noChangeAspect="1"/>
+          </p:cNvPicPr>
+          <p:nvPr/>
+        </p:nvPicPr>
+        <p:blipFill>
+          <a:blip r:embed="rId2"/>
+          <a:stretch>
+            <a:fillRect/>
+          </a:stretch>
+        </p:blipFill>
+        <p:spPr>
+          <a:xfrm>
+            <a:off x="822960" y="1920240"/>
+            <a:ext cx="11887200" cy="3291840"/>
+          </a:xfrm>
+          <a:prstGeom prst="rect">
+            <a:avLst/>
+          </a:prstGeom>
+        </p:spPr>
+      </p:pic>
+      <p:sp>
+        <p:nvSpPr>
+          <p:cNvPr id="5" name="TextBox 4"/>
           <p:cNvSpPr txBox="1"/>
           <p:nvPr/>
         </p:nvSpPr>
         <p:spPr>
           <a:xfrm>
-            <a:off x="822960" y="5806440"/>
+            <a:off x="822960" y="5577840"/>
             <a:ext cx="10515600" cy="914400"/>
           </a:xfrm>
           <a:prstGeom prst="rect">
@@ -4128,7 +3374,7 @@
                 </a:solidFill>
                 <a:latin typeface="Inter"/>
               </a:rPr>
-              <a:t>The deck, the site, and the notebook all read the same export; the export mirrors the cost model exactly and a differential test proves it. No number on any surface has a second source.</a:t>
+              <a:t>Only 4 labels are expert ground truth; construction labels say so wherever they appear.</a:t>
             </a:r>
           </a:p>
         </p:txBody>
@@ -4193,7 +3439,7 @@
                 </a:solidFill>
                 <a:latin typeface="Inter"/>
               </a:rPr>
-              <a:t>PPDAC · DATA</a:t>
+              <a:t>PPDAC · ANALYSIS · THE LADDER</a:t>
             </a:r>
           </a:p>
         </p:txBody>
@@ -4232,14 +3478,14 @@
                 </a:solidFill>
                 <a:latin typeface="Inter"/>
               </a:rPr>
-              <a:t>89 labeled cases, five suites, tiers kept apart</a:t>
+              <a:t>Repeats dissolve stories</a:t>
             </a:r>
           </a:p>
         </p:txBody>
       </p:sp>
       <p:pic>
         <p:nvPicPr>
-          <p:cNvPr id="4" name="Picture 3" descr="eda_corpus.png"/>
+          <p:cNvPr id="4" name="Picture 3" descr="injection_repeats.png"/>
           <p:cNvPicPr>
             <a:picLocks noChangeAspect="1"/>
           </p:cNvPicPr>
@@ -4254,7 +3500,7 @@
         <p:spPr>
           <a:xfrm>
             <a:off x="822960" y="1920240"/>
-            <a:ext cx="11887200" cy="3291840"/>
+            <a:ext cx="6589059" cy="3200400"/>
           </a:xfrm>
           <a:prstGeom prst="rect">
             <a:avLst/>
@@ -4269,7 +3515,7 @@
         </p:nvSpPr>
         <p:spPr>
           <a:xfrm>
-            <a:off x="822960" y="5577840"/>
+            <a:off x="822960" y="5486400"/>
             <a:ext cx="10515600" cy="914400"/>
           </a:xfrm>
           <a:prstGeom prst="rect">
@@ -4295,7 +3541,7 @@
                 </a:solidFill>
                 <a:latin typeface="Inter"/>
               </a:rPr>
-              <a:t>Only 4 labels are expert ground truth; construction labels say so wherever they appear.</a:t>
+              <a:t>A single run showed v4b resisting the hardest planted note; N=5 put every shipped rung in one coin-flip band. The repeat protocol also reversed one gate decision and revoked one perfect score.</a:t>
             </a:r>
           </a:p>
         </p:txBody>
@@ -4360,7 +3606,7 @@
                 </a:solidFill>
                 <a:latin typeface="Inter"/>
               </a:rPr>
-              <a:t>PPDAC · ANALYSIS · THE LADDER</a:t>
+              <a:t>PPDAC · ANALYSIS · THE MATRIX</a:t>
             </a:r>
           </a:p>
         </p:txBody>
@@ -4399,14 +3645,179 @@
                 </a:solidFill>
                 <a:latin typeface="Inter"/>
               </a:rPr>
-              <a:t>Repeats dissolve stories</a:t>
+              <a:t>The gate bites, and ranking survives</a:t>
+            </a:r>
+          </a:p>
+        </p:txBody>
+      </p:sp>
+      <p:sp>
+        <p:nvSpPr>
+          <p:cNvPr id="4" name="TextBox 3"/>
+          <p:cNvSpPr txBox="1"/>
+          <p:nvPr/>
+        </p:nvSpPr>
+        <p:spPr>
+          <a:xfrm>
+            <a:off x="822960" y="1737360"/>
+            <a:ext cx="3566160" cy="2011680"/>
+          </a:xfrm>
+          <a:prstGeom prst="rect">
+            <a:avLst/>
+          </a:prstGeom>
+          <a:noFill/>
+        </p:spPr>
+        <p:txBody>
+          <a:bodyPr wrap="none">
+            <a:spAutoFit/>
+          </a:bodyPr>
+          <a:lstStyle/>
+          <a:p>
+            <a:pPr>
+              <a:spcAft>
+                <a:spcPts val="600"/>
+              </a:spcAft>
+            </a:pPr>
+            <a:r>
+              <a:rPr sz="5800" b="1">
+                <a:solidFill>
+                  <a:srgbClr val="E8ECF4"/>
+                </a:solidFill>
+                <a:latin typeface="Inter"/>
+              </a:rPr>
+              <a:t>38</a:t>
+            </a:r>
+          </a:p>
+          <a:p>
+            <a:pPr>
+              <a:spcAft>
+                <a:spcPts val="600"/>
+              </a:spcAft>
+            </a:pPr>
+            <a:r>
+              <a:rPr sz="1100" b="0">
+                <a:solidFill>
+                  <a:srgbClr val="5C6678"/>
+                </a:solidFill>
+                <a:latin typeface="Inter"/>
+              </a:rPr>
+              <a:t>PROMPT X MODEL CELLS</a:t>
+            </a:r>
+          </a:p>
+        </p:txBody>
+      </p:sp>
+      <p:sp>
+        <p:nvSpPr>
+          <p:cNvPr id="5" name="TextBox 4"/>
+          <p:cNvSpPr txBox="1"/>
+          <p:nvPr/>
+        </p:nvSpPr>
+        <p:spPr>
+          <a:xfrm>
+            <a:off x="4572000" y="1737360"/>
+            <a:ext cx="3566160" cy="2011680"/>
+          </a:xfrm>
+          <a:prstGeom prst="rect">
+            <a:avLst/>
+          </a:prstGeom>
+          <a:noFill/>
+        </p:spPr>
+        <p:txBody>
+          <a:bodyPr wrap="none">
+            <a:spAutoFit/>
+          </a:bodyPr>
+          <a:lstStyle/>
+          <a:p>
+            <a:pPr>
+              <a:spcAft>
+                <a:spcPts val="600"/>
+              </a:spcAft>
+            </a:pPr>
+            <a:r>
+              <a:rPr sz="5800" b="1">
+                <a:solidFill>
+                  <a:srgbClr val="CFA36C"/>
+                </a:solidFill>
+                <a:latin typeface="Inter"/>
+              </a:rPr>
+              <a:t>10</a:t>
+            </a:r>
+          </a:p>
+          <a:p>
+            <a:pPr>
+              <a:spcAft>
+                <a:spcPts val="600"/>
+              </a:spcAft>
+            </a:pPr>
+            <a:r>
+              <a:rPr sz="1100" b="0">
+                <a:solidFill>
+                  <a:srgbClr val="5C6678"/>
+                </a:solidFill>
+                <a:latin typeface="Inter"/>
+              </a:rPr>
+              <a:t>DISQUALIFIED BY THE ZERO-TOLERANCE TRIPWIRE</a:t>
+            </a:r>
+          </a:p>
+        </p:txBody>
+      </p:sp>
+      <p:sp>
+        <p:nvSpPr>
+          <p:cNvPr id="6" name="TextBox 5"/>
+          <p:cNvSpPr txBox="1"/>
+          <p:nvPr/>
+        </p:nvSpPr>
+        <p:spPr>
+          <a:xfrm>
+            <a:off x="8321040" y="1737360"/>
+            <a:ext cx="3566160" cy="2011680"/>
+          </a:xfrm>
+          <a:prstGeom prst="rect">
+            <a:avLst/>
+          </a:prstGeom>
+          <a:noFill/>
+        </p:spPr>
+        <p:txBody>
+          <a:bodyPr wrap="none">
+            <a:spAutoFit/>
+          </a:bodyPr>
+          <a:lstStyle/>
+          <a:p>
+            <a:pPr>
+              <a:spcAft>
+                <a:spcPts val="600"/>
+              </a:spcAft>
+            </a:pPr>
+            <a:r>
+              <a:rPr sz="5800" b="1">
+                <a:solidFill>
+                  <a:srgbClr val="E8ECF4"/>
+                </a:solidFill>
+                <a:latin typeface="Inter"/>
+              </a:rPr>
+              <a:t>9</a:t>
+            </a:r>
+          </a:p>
+          <a:p>
+            <a:pPr>
+              <a:spcAft>
+                <a:spcPts val="600"/>
+              </a:spcAft>
+            </a:pPr>
+            <a:r>
+              <a:rPr sz="1100" b="0">
+                <a:solidFill>
+                  <a:srgbClr val="5C6678"/>
+                </a:solidFill>
+                <a:latin typeface="Inter"/>
+              </a:rPr>
+              <a:t>FULLY TRUSTED CELLS</a:t>
             </a:r>
           </a:p>
         </p:txBody>
       </p:sp>
       <p:pic>
         <p:nvPicPr>
-          <p:cNvPr id="4" name="Picture 3" descr="injection_repeats.png"/>
+          <p:cNvPr id="7" name="Picture 6" descr="bootstrap_loss.png"/>
           <p:cNvPicPr>
             <a:picLocks noChangeAspect="1"/>
           </p:cNvPicPr>
@@ -4420,8 +3831,8 @@
         </p:blipFill>
         <p:spPr>
           <a:xfrm>
-            <a:off x="822960" y="1920240"/>
-            <a:ext cx="6589059" cy="3200400"/>
+            <a:off x="822960" y="3291840"/>
+            <a:ext cx="4064000" cy="2286000"/>
           </a:xfrm>
           <a:prstGeom prst="rect">
             <a:avLst/>
@@ -4430,13 +3841,13 @@
       </p:pic>
       <p:sp>
         <p:nvSpPr>
-          <p:cNvPr id="5" name="TextBox 4"/>
+          <p:cNvPr id="8" name="TextBox 7"/>
           <p:cNvSpPr txBox="1"/>
           <p:nvPr/>
         </p:nvSpPr>
         <p:spPr>
           <a:xfrm>
-            <a:off x="822960" y="5486400"/>
+            <a:off x="822960" y="5120640"/>
             <a:ext cx="10515600" cy="914400"/>
           </a:xfrm>
           <a:prstGeom prst="rect">
@@ -4462,7 +3873,7 @@
                 </a:solidFill>
                 <a:latin typeface="Inter"/>
               </a:rPr>
-              <a:t>A single run showed v4b resisting the hardest planted note; N=5 put every shipped rung in one coin-flip band. The repeat protocol also reversed one gate decision and revoked one perfect score.</a:t>
+              <a:t>Weighted loss is the one OEC; contract, flip, injection, and the tripwire sit OUTSIDE it as guardrails, on purpose: fold them in and the score becomes gameable. The gate fired ten times and the ranking survived.</a:t>
             </a:r>
           </a:p>
         </p:txBody>
@@ -4527,7 +3938,7 @@
                 </a:solidFill>
                 <a:latin typeface="Inter"/>
               </a:rPr>
-              <a:t>PPDAC · ANALYSIS · THE MATRIX</a:t>
+              <a:t>PPDAC · ANALYSIS · CONFIDENCE</a:t>
             </a:r>
           </a:p>
         </p:txBody>
@@ -4566,179 +3977,14 @@
                 </a:solidFill>
                 <a:latin typeface="Inter"/>
               </a:rPr>
-              <a:t>The gate bites, and ranking survives</a:t>
-            </a:r>
-          </a:p>
-        </p:txBody>
-      </p:sp>
-      <p:sp>
-        <p:nvSpPr>
-          <p:cNvPr id="4" name="TextBox 3"/>
-          <p:cNvSpPr txBox="1"/>
-          <p:nvPr/>
-        </p:nvSpPr>
-        <p:spPr>
-          <a:xfrm>
-            <a:off x="822960" y="1737360"/>
-            <a:ext cx="3566160" cy="2011680"/>
-          </a:xfrm>
-          <a:prstGeom prst="rect">
-            <a:avLst/>
-          </a:prstGeom>
-          <a:noFill/>
-        </p:spPr>
-        <p:txBody>
-          <a:bodyPr wrap="none">
-            <a:spAutoFit/>
-          </a:bodyPr>
-          <a:lstStyle/>
-          <a:p>
-            <a:pPr>
-              <a:spcAft>
-                <a:spcPts val="600"/>
-              </a:spcAft>
-            </a:pPr>
-            <a:r>
-              <a:rPr sz="5800" b="1">
-                <a:solidFill>
-                  <a:srgbClr val="E8ECF4"/>
-                </a:solidFill>
-                <a:latin typeface="Inter"/>
-              </a:rPr>
-              <a:t>38</a:t>
-            </a:r>
-          </a:p>
-          <a:p>
-            <a:pPr>
-              <a:spcAft>
-                <a:spcPts val="600"/>
-              </a:spcAft>
-            </a:pPr>
-            <a:r>
-              <a:rPr sz="1100" b="0">
-                <a:solidFill>
-                  <a:srgbClr val="5C6678"/>
-                </a:solidFill>
-                <a:latin typeface="Inter"/>
-              </a:rPr>
-              <a:t>PROMPT X MODEL CELLS</a:t>
-            </a:r>
-          </a:p>
-        </p:txBody>
-      </p:sp>
-      <p:sp>
-        <p:nvSpPr>
-          <p:cNvPr id="5" name="TextBox 4"/>
-          <p:cNvSpPr txBox="1"/>
-          <p:nvPr/>
-        </p:nvSpPr>
-        <p:spPr>
-          <a:xfrm>
-            <a:off x="4572000" y="1737360"/>
-            <a:ext cx="3566160" cy="2011680"/>
-          </a:xfrm>
-          <a:prstGeom prst="rect">
-            <a:avLst/>
-          </a:prstGeom>
-          <a:noFill/>
-        </p:spPr>
-        <p:txBody>
-          <a:bodyPr wrap="none">
-            <a:spAutoFit/>
-          </a:bodyPr>
-          <a:lstStyle/>
-          <a:p>
-            <a:pPr>
-              <a:spcAft>
-                <a:spcPts val="600"/>
-              </a:spcAft>
-            </a:pPr>
-            <a:r>
-              <a:rPr sz="5800" b="1">
-                <a:solidFill>
-                  <a:srgbClr val="CFA36C"/>
-                </a:solidFill>
-                <a:latin typeface="Inter"/>
-              </a:rPr>
-              <a:t>10</a:t>
-            </a:r>
-          </a:p>
-          <a:p>
-            <a:pPr>
-              <a:spcAft>
-                <a:spcPts val="600"/>
-              </a:spcAft>
-            </a:pPr>
-            <a:r>
-              <a:rPr sz="1100" b="0">
-                <a:solidFill>
-                  <a:srgbClr val="5C6678"/>
-                </a:solidFill>
-                <a:latin typeface="Inter"/>
-              </a:rPr>
-              <a:t>DISQUALIFIED BY THE ZERO-TOLERANCE TRIPWIRE</a:t>
-            </a:r>
-          </a:p>
-        </p:txBody>
-      </p:sp>
-      <p:sp>
-        <p:nvSpPr>
-          <p:cNvPr id="6" name="TextBox 5"/>
-          <p:cNvSpPr txBox="1"/>
-          <p:nvPr/>
-        </p:nvSpPr>
-        <p:spPr>
-          <a:xfrm>
-            <a:off x="8321040" y="1737360"/>
-            <a:ext cx="3566160" cy="2011680"/>
-          </a:xfrm>
-          <a:prstGeom prst="rect">
-            <a:avLst/>
-          </a:prstGeom>
-          <a:noFill/>
-        </p:spPr>
-        <p:txBody>
-          <a:bodyPr wrap="none">
-            <a:spAutoFit/>
-          </a:bodyPr>
-          <a:lstStyle/>
-          <a:p>
-            <a:pPr>
-              <a:spcAft>
-                <a:spcPts val="600"/>
-              </a:spcAft>
-            </a:pPr>
-            <a:r>
-              <a:rPr sz="5800" b="1">
-                <a:solidFill>
-                  <a:srgbClr val="E8ECF4"/>
-                </a:solidFill>
-                <a:latin typeface="Inter"/>
-              </a:rPr>
-              <a:t>9</a:t>
-            </a:r>
-          </a:p>
-          <a:p>
-            <a:pPr>
-              <a:spcAft>
-                <a:spcPts val="600"/>
-              </a:spcAft>
-            </a:pPr>
-            <a:r>
-              <a:rPr sz="1100" b="0">
-                <a:solidFill>
-                  <a:srgbClr val="5C6678"/>
-                </a:solidFill>
-                <a:latin typeface="Inter"/>
-              </a:rPr>
-              <a:t>FULLY TRUSTED CELLS</a:t>
+              <a:t>Stated confidence is decorative; earned confidence is measured</a:t>
             </a:r>
           </a:p>
         </p:txBody>
       </p:sp>
       <p:pic>
         <p:nvPicPr>
-          <p:cNvPr id="7" name="Picture 6" descr="bootstrap_loss.png"/>
+          <p:cNvPr id="4" name="Picture 3" descr="reliability.png"/>
           <p:cNvPicPr>
             <a:picLocks noChangeAspect="1"/>
           </p:cNvPicPr>
@@ -4752,8 +3998,8 @@
         </p:blipFill>
         <p:spPr>
           <a:xfrm>
-            <a:off x="822960" y="3291840"/>
-            <a:ext cx="4064000" cy="2286000"/>
+            <a:off x="822960" y="1920240"/>
+            <a:ext cx="7786309" cy="3383280"/>
           </a:xfrm>
           <a:prstGeom prst="rect">
             <a:avLst/>
@@ -4762,13 +4008,13 @@
       </p:pic>
       <p:sp>
         <p:nvSpPr>
-          <p:cNvPr id="8" name="TextBox 7"/>
+          <p:cNvPr id="5" name="TextBox 4"/>
           <p:cNvSpPr txBox="1"/>
           <p:nvPr/>
         </p:nvSpPr>
         <p:spPr>
           <a:xfrm>
-            <a:off x="822960" y="5120640"/>
+            <a:off x="822960" y="5577840"/>
             <a:ext cx="10515600" cy="914400"/>
           </a:xfrm>
           <a:prstGeom prst="rect">
@@ -4794,7 +4040,7 @@
                 </a:solidFill>
                 <a:latin typeface="Inter"/>
               </a:rPr>
-              <a:t>Weighted loss is the one OEC; contract, flip, injection, and the tripwire sit OUTSIDE it as guardrails, on purpose: fold them in and the score becomes gameable. The gate fired ten times and the ranking survived.</a:t>
+              <a:t>All 21 stated confidences live between 0.90 and 1.00 while the runs earn 0.90 overall; at stated 0.90 the model was right once in two. The replacement: vote fraction over N=5 temperature-raised repeats.</a:t>
             </a:r>
           </a:p>
         </p:txBody>
@@ -4859,7 +4105,7 @@
                 </a:solidFill>
                 <a:latin typeface="Inter"/>
               </a:rPr>
-              <a:t>PPDAC · ANALYSIS · CONFIDENCE</a:t>
+              <a:t>PPDAC · ANALYSIS · THE JUDGE</a:t>
             </a:r>
           </a:p>
         </p:txBody>
@@ -4898,35 +4144,136 @@
                 </a:solidFill>
                 <a:latin typeface="Inter"/>
               </a:rPr>
-              <a:t>Stated confidence is decorative; earned confidence is measured</a:t>
-            </a:r>
-          </a:p>
-        </p:txBody>
-      </p:sp>
-      <p:pic>
-        <p:nvPicPr>
-          <p:cNvPr id="4" name="Picture 3" descr="reliability.png"/>
-          <p:cNvPicPr>
-            <a:picLocks noChangeAspect="1"/>
-          </p:cNvPicPr>
-          <p:nvPr/>
-        </p:nvPicPr>
-        <p:blipFill>
-          <a:blip r:embed="rId2"/>
-          <a:stretch>
-            <a:fillRect/>
-          </a:stretch>
-        </p:blipFill>
-        <p:spPr>
-          <a:xfrm>
-            <a:off x="822960" y="1920240"/>
-            <a:ext cx="7786309" cy="3383280"/>
+              <a:t>Triangulated across three families</a:t>
+            </a:r>
+          </a:p>
+        </p:txBody>
+      </p:sp>
+      <p:sp>
+        <p:nvSpPr>
+          <p:cNvPr id="4" name="TextBox 3"/>
+          <p:cNvSpPr txBox="1"/>
+          <p:nvPr/>
+        </p:nvSpPr>
+        <p:spPr>
+          <a:xfrm>
+            <a:off x="822960" y="2103120"/>
+            <a:ext cx="10424160" cy="3108960"/>
           </a:xfrm>
           <a:prstGeom prst="rect">
             <a:avLst/>
           </a:prstGeom>
-        </p:spPr>
-      </p:pic>
+          <a:noFill/>
+        </p:spPr>
+        <p:txBody>
+          <a:bodyPr wrap="none">
+            <a:spAutoFit/>
+          </a:bodyPr>
+          <a:lstStyle/>
+          <a:p>
+            <a:pPr>
+              <a:spcAft>
+                <a:spcPts val="1600"/>
+              </a:spcAft>
+            </a:pPr>
+            <a:r>
+              <a:rPr sz="1800" b="1">
+                <a:solidFill>
+                  <a:srgbClr val="E8ECF4"/>
+                </a:solidFill>
+                <a:latin typeface="Consolas"/>
+              </a:rPr>
+              <a:t>gemini-flash          </a:t>
+            </a:r>
+            <a:r>
+              <a:rPr sz="1800" b="1">
+                <a:solidFill>
+                  <a:srgbClr val="F87171"/>
+                </a:solidFill>
+                <a:latin typeface="Consolas"/>
+              </a:rPr>
+              <a:t>  5.0 / 5.0 / 5.0   </a:t>
+            </a:r>
+            <a:r>
+              <a:rPr sz="1400">
+                <a:solidFill>
+                  <a:srgbClr val="8A93A3"/>
+                </a:solidFill>
+                <a:latin typeface="Inter"/>
+              </a:rPr>
+              <a:t>saturated: a dead instrument, reported as one</a:t>
+            </a:r>
+          </a:p>
+          <a:p>
+            <a:pPr>
+              <a:spcAft>
+                <a:spcPts val="1600"/>
+              </a:spcAft>
+            </a:pPr>
+            <a:r>
+              <a:rPr sz="1800" b="1">
+                <a:solidFill>
+                  <a:srgbClr val="E8ECF4"/>
+                </a:solidFill>
+                <a:latin typeface="Consolas"/>
+              </a:rPr>
+              <a:t>claude-haiku          </a:t>
+            </a:r>
+            <a:r>
+              <a:rPr sz="1800" b="1">
+                <a:solidFill>
+                  <a:srgbClr val="4ADE80"/>
+                </a:solidFill>
+                <a:latin typeface="Consolas"/>
+              </a:rPr>
+              <a:t>  4.2 / 3.9 / 3.1   </a:t>
+            </a:r>
+            <a:r>
+              <a:rPr sz="1400">
+                <a:solidFill>
+                  <a:srgbClr val="8A93A3"/>
+                </a:solidFill>
+                <a:latin typeface="Inter"/>
+              </a:rPr>
+              <a:t>discriminates; proportionality lowest</a:t>
+            </a:r>
+          </a:p>
+          <a:p>
+            <a:pPr>
+              <a:spcAft>
+                <a:spcPts val="1600"/>
+              </a:spcAft>
+            </a:pPr>
+            <a:r>
+              <a:rPr sz="1800" b="1">
+                <a:solidFill>
+                  <a:srgbClr val="E8ECF4"/>
+                </a:solidFill>
+                <a:latin typeface="Consolas"/>
+              </a:rPr>
+              <a:t>phi-4 (microsoft)     </a:t>
+            </a:r>
+            <a:r>
+              <a:rPr sz="1800" b="1">
+                <a:solidFill>
+                  <a:srgbClr val="4ADE80"/>
+                </a:solidFill>
+                <a:latin typeface="Consolas"/>
+              </a:rPr>
+              <a:t>  4.6 / 5.0 / 4.7   </a:t>
+            </a:r>
+            <a:r>
+              <a:rPr sz="1400">
+                <a:solidFill>
+                  <a:srgbClr val="8A93A3"/>
+                </a:solidFill>
+                <a:latin typeface="Inter"/>
+              </a:rPr>
+              <a:t>third family, overlaps no judged column</a:t>
+            </a:r>
+          </a:p>
+        </p:txBody>
+      </p:sp>
       <p:sp>
         <p:nvSpPr>
           <p:cNvPr id="5" name="TextBox 4"/>
@@ -4935,7 +4282,7 @@
         </p:nvSpPr>
         <p:spPr>
           <a:xfrm>
-            <a:off x="822960" y="5577840"/>
+            <a:off x="822960" y="5394960"/>
             <a:ext cx="10515600" cy="914400"/>
           </a:xfrm>
           <a:prstGeom prst="rect">
@@ -4961,7 +4308,7 @@
                 </a:solidFill>
                 <a:latin typeface="Inter"/>
               </a:rPr>
-              <a:t>All 21 stated confidences live between 0.90 and 1.00 while the runs earn 0.90 overall; at stated 0.90 the model was right once in two. The replacement: vote fraction over N=5 temperature-raised repeats.</a:t>
+              <a:t>Both discriminating families score proportionality lowest, the axis the policy makes hardest. The saturated judge is never averaged in.</a:t>
             </a:r>
           </a:p>
         </p:txBody>
@@ -5026,7 +4373,7 @@
                 </a:solidFill>
                 <a:latin typeface="Inter"/>
               </a:rPr>
-              <a:t>PPDAC · ANALYSIS · THE JUDGE</a:t>
+              <a:t>PPDAC · ANALYSIS · SCALE</a:t>
             </a:r>
           </a:p>
         </p:txBody>
@@ -5065,136 +4412,35 @@
                 </a:solidFill>
                 <a:latin typeface="Inter"/>
               </a:rPr>
-              <a:t>Triangulated across three families</a:t>
-            </a:r>
-          </a:p>
-        </p:txBody>
-      </p:sp>
-      <p:sp>
-        <p:nvSpPr>
-          <p:cNvPr id="4" name="TextBox 3"/>
-          <p:cNvSpPr txBox="1"/>
-          <p:nvPr/>
-        </p:nvSpPr>
-        <p:spPr>
-          <a:xfrm>
-            <a:off x="822960" y="2103120"/>
-            <a:ext cx="10424160" cy="3108960"/>
+              <a:t>64 generated cases found a policy ambiguity</a:t>
+            </a:r>
+          </a:p>
+        </p:txBody>
+      </p:sp>
+      <p:pic>
+        <p:nvPicPr>
+          <p:cNvPr id="4" name="Picture 3" descr="synthetic_sweep.png"/>
+          <p:cNvPicPr>
+            <a:picLocks noChangeAspect="1"/>
+          </p:cNvPicPr>
+          <p:nvPr/>
+        </p:nvPicPr>
+        <p:blipFill>
+          <a:blip r:embed="rId2"/>
+          <a:stretch>
+            <a:fillRect/>
+          </a:stretch>
+        </p:blipFill>
+        <p:spPr>
+          <a:xfrm>
+            <a:off x="822960" y="1920240"/>
+            <a:ext cx="6463476" cy="3200400"/>
           </a:xfrm>
           <a:prstGeom prst="rect">
             <a:avLst/>
           </a:prstGeom>
-          <a:noFill/>
-        </p:spPr>
-        <p:txBody>
-          <a:bodyPr wrap="none">
-            <a:spAutoFit/>
-          </a:bodyPr>
-          <a:lstStyle/>
-          <a:p>
-            <a:pPr>
-              <a:spcAft>
-                <a:spcPts val="1600"/>
-              </a:spcAft>
-            </a:pPr>
-            <a:r>
-              <a:rPr sz="1800" b="1">
-                <a:solidFill>
-                  <a:srgbClr val="E8ECF4"/>
-                </a:solidFill>
-                <a:latin typeface="Consolas"/>
-              </a:rPr>
-              <a:t>gemini-flash          </a:t>
-            </a:r>
-            <a:r>
-              <a:rPr sz="1800" b="1">
-                <a:solidFill>
-                  <a:srgbClr val="F87171"/>
-                </a:solidFill>
-                <a:latin typeface="Consolas"/>
-              </a:rPr>
-              <a:t>  5.0 / 5.0 / 5.0   </a:t>
-            </a:r>
-            <a:r>
-              <a:rPr sz="1400">
-                <a:solidFill>
-                  <a:srgbClr val="8A93A3"/>
-                </a:solidFill>
-                <a:latin typeface="Inter"/>
-              </a:rPr>
-              <a:t>saturated: a dead instrument, reported as one</a:t>
-            </a:r>
-          </a:p>
-          <a:p>
-            <a:pPr>
-              <a:spcAft>
-                <a:spcPts val="1600"/>
-              </a:spcAft>
-            </a:pPr>
-            <a:r>
-              <a:rPr sz="1800" b="1">
-                <a:solidFill>
-                  <a:srgbClr val="E8ECF4"/>
-                </a:solidFill>
-                <a:latin typeface="Consolas"/>
-              </a:rPr>
-              <a:t>claude-haiku          </a:t>
-            </a:r>
-            <a:r>
-              <a:rPr sz="1800" b="1">
-                <a:solidFill>
-                  <a:srgbClr val="4ADE80"/>
-                </a:solidFill>
-                <a:latin typeface="Consolas"/>
-              </a:rPr>
-              <a:t>  4.2 / 3.9 / 3.1   </a:t>
-            </a:r>
-            <a:r>
-              <a:rPr sz="1400">
-                <a:solidFill>
-                  <a:srgbClr val="8A93A3"/>
-                </a:solidFill>
-                <a:latin typeface="Inter"/>
-              </a:rPr>
-              <a:t>discriminates; proportionality lowest</a:t>
-            </a:r>
-          </a:p>
-          <a:p>
-            <a:pPr>
-              <a:spcAft>
-                <a:spcPts val="1600"/>
-              </a:spcAft>
-            </a:pPr>
-            <a:r>
-              <a:rPr sz="1800" b="1">
-                <a:solidFill>
-                  <a:srgbClr val="E8ECF4"/>
-                </a:solidFill>
-                <a:latin typeface="Consolas"/>
-              </a:rPr>
-              <a:t>phi-4 (microsoft)     </a:t>
-            </a:r>
-            <a:r>
-              <a:rPr sz="1800" b="1">
-                <a:solidFill>
-                  <a:srgbClr val="4ADE80"/>
-                </a:solidFill>
-                <a:latin typeface="Consolas"/>
-              </a:rPr>
-              <a:t>  4.6 / 5.0 / 4.7   </a:t>
-            </a:r>
-            <a:r>
-              <a:rPr sz="1400">
-                <a:solidFill>
-                  <a:srgbClr val="8A93A3"/>
-                </a:solidFill>
-                <a:latin typeface="Inter"/>
-              </a:rPr>
-              <a:t>third family, overlaps no judged column</a:t>
-            </a:r>
-          </a:p>
-        </p:txBody>
-      </p:sp>
+        </p:spPr>
+      </p:pic>
       <p:sp>
         <p:nvSpPr>
           <p:cNvPr id="5" name="TextBox 4"/>
@@ -5203,7 +4449,7 @@
         </p:nvSpPr>
         <p:spPr>
           <a:xfrm>
-            <a:off x="822960" y="5394960"/>
+            <a:off x="822960" y="5486400"/>
             <a:ext cx="10515600" cy="914400"/>
           </a:xfrm>
           <a:prstGeom prst="rect">
@@ -5229,7 +4475,7 @@
                 </a:solidFill>
                 <a:latin typeface="Inter"/>
               </a:rPr>
-              <a:t>Both discriminating families score proportionality lowest, the axis the policy makes hardest. The saturated judge is never averaged in.</a:t>
+              <a:t>v5 sweeps the uncontested archetypes 48/48 (v1: 44/48). The contested family splits seven models 20-8 with no family pattern: the disagreement lives in the policy text, routed to its owner, never resolved by me.</a:t>
             </a:r>
           </a:p>
         </p:txBody>
@@ -5294,7 +4540,7 @@
                 </a:solidFill>
                 <a:latin typeface="Inter"/>
               </a:rPr>
-              <a:t>PPDAC · ANALYSIS · SCALE</a:t>
+              <a:t>THE QUESTION A 100% ROW EARNS</a:t>
             </a:r>
           </a:p>
         </p:txBody>
@@ -5333,45 +4579,21 @@
                 </a:solidFill>
                 <a:latin typeface="Inter"/>
               </a:rPr>
-              <a:t>64 generated cases found a policy ambiguity</a:t>
-            </a:r>
-          </a:p>
-        </p:txBody>
-      </p:sp>
-      <p:pic>
-        <p:nvPicPr>
-          <p:cNvPr id="4" name="Picture 3" descr="synthetic_sweep.png"/>
-          <p:cNvPicPr>
-            <a:picLocks noChangeAspect="1"/>
-          </p:cNvPicPr>
-          <p:nvPr/>
-        </p:nvPicPr>
-        <p:blipFill>
-          <a:blip r:embed="rId2"/>
-          <a:stretch>
-            <a:fillRect/>
-          </a:stretch>
-        </p:blipFill>
-        <p:spPr>
-          <a:xfrm>
-            <a:off x="822960" y="1920240"/>
-            <a:ext cx="6463476" cy="3200400"/>
-          </a:xfrm>
-          <a:prstGeom prst="rect">
-            <a:avLst/>
-          </a:prstGeom>
-        </p:spPr>
-      </p:pic>
-      <p:sp>
-        <p:nvSpPr>
-          <p:cNvPr id="5" name="TextBox 4"/>
+              <a:t>Is v5 overfit to nine cases? Three tests, one open risk</a:t>
+            </a:r>
+          </a:p>
+        </p:txBody>
+      </p:sp>
+      <p:sp>
+        <p:nvSpPr>
+          <p:cNvPr id="4" name="TextBox 3"/>
           <p:cNvSpPr txBox="1"/>
           <p:nvPr/>
         </p:nvSpPr>
         <p:spPr>
           <a:xfrm>
-            <a:off x="822960" y="5486400"/>
-            <a:ext cx="10515600" cy="914400"/>
+            <a:off x="822960" y="1828800"/>
+            <a:ext cx="10424160" cy="4297680"/>
           </a:xfrm>
           <a:prstGeom prst="rect">
             <a:avLst/>
@@ -5386,17 +4608,126 @@
           <a:p>
             <a:pPr>
               <a:spcAft>
-                <a:spcPts val="600"/>
-              </a:spcAft>
-            </a:pPr>
-            <a:r>
-              <a:rPr sz="1300" b="0">
+                <a:spcPts val="1100"/>
+              </a:spcAft>
+            </a:pPr>
+            <a:r>
+              <a:rPr sz="1400" b="1">
+                <a:solidFill>
+                  <a:srgbClr val="E8ECF4"/>
+                </a:solidFill>
+                <a:latin typeface="Inter"/>
+              </a:rPr>
+              <a:t>Transfer it never trained for: </a:t>
+            </a:r>
+            <a:r>
+              <a:rPr sz="1400">
                 <a:solidFill>
                   <a:srgbClr val="8A93A3"/>
                 </a:solidFill>
                 <a:latin typeface="Inter"/>
               </a:rPr>
-              <a:t>v5 sweeps the uncontested archetypes 48/48 (v1: 44/48). The contested family splits seven models 20-8 with no family pattern: the disagreement lives in the policy text, routed to its owner, never resolved by me.</a:t>
+              <a:t>v5 was tuned against gemini-flash only. Unchanged, it scores 12/12 on claude-sonnet and claude-haiku and 11/12 on gemini-pro (n=12 each).</a:t>
+            </a:r>
+          </a:p>
+          <a:p>
+            <a:pPr>
+              <a:spcAft>
+                <a:spcPts val="1100"/>
+              </a:spcAft>
+            </a:pPr>
+            <a:r>
+              <a:rPr sz="1400" b="1">
+                <a:solidFill>
+                  <a:srgbClr val="E8ECF4"/>
+                </a:solidFill>
+                <a:latin typeface="Inter"/>
+              </a:rPr>
+              <a:t>Data authored after the freeze: </a:t>
+            </a:r>
+            <a:r>
+              <a:rPr sz="1400">
+                <a:solidFill>
+                  <a:srgbClr val="8A93A3"/>
+                </a:solidFill>
+                <a:latin typeface="Inter"/>
+              </a:rPr>
+              <a:t>the 64 generated cases did not exist when v5 froze. It sweeps 56/56 on flash, 48/48 on qwen, 46/48 on gemini-pro. Overfit collapses on unseen data; this did not.</a:t>
+            </a:r>
+          </a:p>
+          <a:p>
+            <a:pPr>
+              <a:spcAft>
+                <a:spcPts val="1100"/>
+              </a:spcAft>
+            </a:pPr>
+            <a:r>
+              <a:rPr sz="1400" b="1">
+                <a:solidFill>
+                  <a:srgbClr val="E8ECF4"/>
+                </a:solidFill>
+                <a:latin typeface="Inter"/>
+              </a:rPr>
+              <a:t>Weak columns fail for capacity, not memorization: </a:t>
+            </a:r>
+            <a:r>
+              <a:rPr sz="1400">
+                <a:solidFill>
+                  <a:srgbClr val="8A93A3"/>
+                </a:solidFill>
+                <a:latin typeface="Inter"/>
+              </a:rPr>
+              <a:t>llama trails at every rung, 8/12 on v1 before any tuning existed, 9/12 at v5 with contract 1.00. The ladder never bent toward its failures, and they predate it.</a:t>
+            </a:r>
+          </a:p>
+          <a:p>
+            <a:pPr>
+              <a:spcAft>
+                <a:spcPts val="1100"/>
+              </a:spcAft>
+            </a:pPr>
+            <a:r>
+              <a:rPr sz="1400" b="1">
+                <a:solidFill>
+                  <a:srgbClr val="E8ECF4"/>
+                </a:solidFill>
+                <a:latin typeface="Inter"/>
+              </a:rPr>
+              <a:t>The discipline check: </a:t>
+            </a:r>
+            <a:r>
+              <a:rPr sz="1400">
+                <a:solidFill>
+                  <a:srgbClr val="8A93A3"/>
+                </a:solidFill>
+                <a:latin typeface="Inter"/>
+              </a:rPr>
+              <a:t>v6 was rejected on its own pre-registered bar. An overfitting process chases the suite; this one turned down a better injection score.</a:t>
+            </a:r>
+          </a:p>
+          <a:p>
+            <a:pPr>
+              <a:spcAft>
+                <a:spcPts val="1100"/>
+              </a:spcAft>
+            </a:pPr>
+            <a:r>
+              <a:rPr sz="1400" b="1">
+                <a:solidFill>
+                  <a:srgbClr val="E8ECF4"/>
+                </a:solidFill>
+                <a:latin typeface="Inter"/>
+              </a:rPr>
+              <a:t>Open, stated: </a:t>
+            </a:r>
+            <a:r>
+              <a:rPr sz="1400">
+                <a:solidFill>
+                  <a:srgbClr val="8A93A3"/>
+                </a:solidFill>
+                <a:latin typeface="Inter"/>
+              </a:rPr>
+              <a:t>the true holdout is n=3 (v5: 2/3), too small to certify anything. That is why the gates carry the ship claim and more expert labels is the named blocker.</a:t>
             </a:r>
           </a:p>
         </p:txBody>
@@ -5461,7 +4792,7 @@
                 </a:solidFill>
                 <a:latin typeface="Inter"/>
               </a:rPr>
-              <a:t>THE QUESTION A 100% ROW EARNS</a:t>
+              <a:t>PPDAC · ANALYSIS · THE QUEUE</a:t>
             </a:r>
           </a:p>
         </p:txBody>
@@ -5500,21 +4831,576 @@
                 </a:solidFill>
                 <a:latin typeface="Inter"/>
               </a:rPr>
-              <a:t>Is v5 overfit to nine cases? Three tests, one open risk</a:t>
-            </a:r>
-          </a:p>
-        </p:txBody>
-      </p:sp>
-      <p:sp>
-        <p:nvSpPr>
-          <p:cNvPr id="4" name="TextBox 3"/>
+              <a:t>A contested case is routed, not resolved</a:t>
+            </a:r>
+          </a:p>
+        </p:txBody>
+      </p:sp>
+      <p:sp>
+        <p:nvSpPr>
+          <p:cNvPr id="4" name="Rounded Rectangle 3"/>
+          <p:cNvSpPr/>
+          <p:nvPr/>
+        </p:nvSpPr>
+        <p:spPr>
+          <a:xfrm>
+            <a:off x="822960" y="3017520"/>
+            <a:ext cx="2286000" cy="960120"/>
+          </a:xfrm>
+          <a:prstGeom prst="roundRect">
+            <a:avLst/>
+          </a:prstGeom>
+          <a:solidFill>
+            <a:srgbClr val="111420"/>
+          </a:solidFill>
+          <a:ln w="15240">
+            <a:solidFill>
+              <a:srgbClr val="3A3F4E"/>
+            </a:solidFill>
+          </a:ln>
+          <a:effectLst/>
+        </p:spPr>
+        <p:style>
+          <a:lnRef idx="1">
+            <a:schemeClr val="accent1"/>
+          </a:lnRef>
+          <a:fillRef idx="3">
+            <a:schemeClr val="accent1"/>
+          </a:fillRef>
+          <a:effectRef idx="2">
+            <a:schemeClr val="accent1"/>
+          </a:effectRef>
+          <a:fontRef idx="minor">
+            <a:schemeClr val="lt1"/>
+          </a:fontRef>
+        </p:style>
+        <p:txBody>
+          <a:bodyPr rtlCol="0" anchor="ctr" wrap="square"/>
+          <a:lstStyle/>
+          <a:p>
+            <a:pPr algn="ctr">
+              <a:spcAft>
+                <a:spcPts val="200"/>
+              </a:spcAft>
+            </a:pPr>
+            <a:r>
+              <a:rPr sz="1300" b="1">
+                <a:solidFill>
+                  <a:srgbClr val="E8ECF4"/>
+                </a:solidFill>
+                <a:latin typeface="Inter"/>
+              </a:rPr>
+              <a:t>data_quality_flag</a:t>
+            </a:r>
+          </a:p>
+          <a:p>
+            <a:pPr>
+              <a:spcAft>
+                <a:spcPts val="0"/>
+              </a:spcAft>
+            </a:pPr>
+            <a:r>
+              <a:rPr sz="1000" b="0">
+                <a:solidFill>
+                  <a:srgbClr val="8A93A3"/>
+                </a:solidFill>
+                <a:latin typeface="Inter"/>
+              </a:rPr>
+              <a:t>generated archetype, 28 runs</a:t>
+            </a:r>
+          </a:p>
+        </p:txBody>
+      </p:sp>
+      <p:sp>
+        <p:nvSpPr>
+          <p:cNvPr id="5" name="Rounded Rectangle 4"/>
+          <p:cNvSpPr/>
+          <p:nvPr/>
+        </p:nvSpPr>
+        <p:spPr>
+          <a:xfrm>
+            <a:off x="3657600" y="3017520"/>
+            <a:ext cx="2286000" cy="960120"/>
+          </a:xfrm>
+          <a:prstGeom prst="roundRect">
+            <a:avLst/>
+          </a:prstGeom>
+          <a:solidFill>
+            <a:srgbClr val="111420"/>
+          </a:solidFill>
+          <a:ln w="15240">
+            <a:solidFill>
+              <a:srgbClr val="828FFF"/>
+            </a:solidFill>
+          </a:ln>
+          <a:effectLst/>
+        </p:spPr>
+        <p:style>
+          <a:lnRef idx="1">
+            <a:schemeClr val="accent1"/>
+          </a:lnRef>
+          <a:fillRef idx="3">
+            <a:schemeClr val="accent1"/>
+          </a:fillRef>
+          <a:effectRef idx="2">
+            <a:schemeClr val="accent1"/>
+          </a:effectRef>
+          <a:fontRef idx="minor">
+            <a:schemeClr val="lt1"/>
+          </a:fontRef>
+        </p:style>
+        <p:txBody>
+          <a:bodyPr rtlCol="0" anchor="ctr" wrap="square"/>
+          <a:lstStyle/>
+          <a:p>
+            <a:pPr algn="ctr">
+              <a:spcAft>
+                <a:spcPts val="200"/>
+              </a:spcAft>
+            </a:pPr>
+            <a:r>
+              <a:rPr sz="1300" b="1">
+                <a:solidFill>
+                  <a:srgbClr val="E8ECF4"/>
+                </a:solidFill>
+                <a:latin typeface="Inter"/>
+              </a:rPr>
+              <a:t>seven models</a:t>
+            </a:r>
+          </a:p>
+          <a:p>
+            <a:pPr>
+              <a:spcAft>
+                <a:spcPts val="0"/>
+              </a:spcAft>
+            </a:pPr>
+            <a:r>
+              <a:rPr sz="1000" b="0">
+                <a:solidFill>
+                  <a:srgbClr val="8A93A3"/>
+                </a:solidFill>
+                <a:latin typeface="Inter"/>
+              </a:rPr>
+              <a:t>split 20 HOLD / 8 REJECT</a:t>
+            </a:r>
+          </a:p>
+        </p:txBody>
+      </p:sp>
+      <p:sp>
+        <p:nvSpPr>
+          <p:cNvPr id="6" name="Rounded Rectangle 5"/>
+          <p:cNvSpPr/>
+          <p:nvPr/>
+        </p:nvSpPr>
+        <p:spPr>
+          <a:xfrm>
+            <a:off x="6583680" y="2011680"/>
+            <a:ext cx="2377440" cy="960120"/>
+          </a:xfrm>
+          <a:prstGeom prst="roundRect">
+            <a:avLst/>
+          </a:prstGeom>
+          <a:solidFill>
+            <a:srgbClr val="111420"/>
+          </a:solidFill>
+          <a:ln w="15240">
+            <a:solidFill>
+              <a:srgbClr val="F87171"/>
+            </a:solidFill>
+          </a:ln>
+          <a:effectLst/>
+        </p:spPr>
+        <p:style>
+          <a:lnRef idx="1">
+            <a:schemeClr val="accent1"/>
+          </a:lnRef>
+          <a:fillRef idx="3">
+            <a:schemeClr val="accent1"/>
+          </a:fillRef>
+          <a:effectRef idx="2">
+            <a:schemeClr val="accent1"/>
+          </a:effectRef>
+          <a:fontRef idx="minor">
+            <a:schemeClr val="lt1"/>
+          </a:fontRef>
+        </p:style>
+        <p:txBody>
+          <a:bodyPr rtlCol="0" anchor="ctr" wrap="square"/>
+          <a:lstStyle/>
+          <a:p>
+            <a:pPr algn="ctr">
+              <a:spcAft>
+                <a:spcPts val="200"/>
+              </a:spcAft>
+            </a:pPr>
+            <a:r>
+              <a:rPr sz="1300" b="1">
+                <a:solidFill>
+                  <a:srgbClr val="E8ECF4"/>
+                </a:solidFill>
+                <a:latin typeface="Inter"/>
+              </a:rPr>
+              <a:t>not a model error</a:t>
+            </a:r>
+          </a:p>
+          <a:p>
+            <a:pPr>
+              <a:spcAft>
+                <a:spcPts val="0"/>
+              </a:spcAft>
+            </a:pPr>
+            <a:r>
+              <a:rPr sz="1000" b="0">
+                <a:solidFill>
+                  <a:srgbClr val="8A93A3"/>
+                </a:solidFill>
+                <a:latin typeface="Inter"/>
+              </a:rPr>
+              <a:t>POLICY.md underdetermines it</a:t>
+            </a:r>
+          </a:p>
+        </p:txBody>
+      </p:sp>
+      <p:sp>
+        <p:nvSpPr>
+          <p:cNvPr id="7" name="Rounded Rectangle 6"/>
+          <p:cNvSpPr/>
+          <p:nvPr/>
+        </p:nvSpPr>
+        <p:spPr>
+          <a:xfrm>
+            <a:off x="6583680" y="4114800"/>
+            <a:ext cx="2377440" cy="960120"/>
+          </a:xfrm>
+          <a:prstGeom prst="roundRect">
+            <a:avLst/>
+          </a:prstGeom>
+          <a:solidFill>
+            <a:srgbClr val="111420"/>
+          </a:solidFill>
+          <a:ln w="15240">
+            <a:solidFill>
+              <a:srgbClr val="3A3F4E"/>
+            </a:solidFill>
+          </a:ln>
+          <a:effectLst/>
+        </p:spPr>
+        <p:style>
+          <a:lnRef idx="1">
+            <a:schemeClr val="accent1"/>
+          </a:lnRef>
+          <a:fillRef idx="3">
+            <a:schemeClr val="accent1"/>
+          </a:fillRef>
+          <a:effectRef idx="2">
+            <a:schemeClr val="accent1"/>
+          </a:effectRef>
+          <a:fontRef idx="minor">
+            <a:schemeClr val="lt1"/>
+          </a:fontRef>
+        </p:style>
+        <p:txBody>
+          <a:bodyPr rtlCol="0" anchor="ctr" wrap="square"/>
+          <a:lstStyle/>
+          <a:p>
+            <a:pPr algn="ctr">
+              <a:spcAft>
+                <a:spcPts val="200"/>
+              </a:spcAft>
+            </a:pPr>
+            <a:r>
+              <a:rPr sz="1300" b="1">
+                <a:solidFill>
+                  <a:srgbClr val="E8ECF4"/>
+                </a:solidFill>
+                <a:latin typeface="Inter"/>
+              </a:rPr>
+              <a:t>no score assigned</a:t>
+            </a:r>
+          </a:p>
+          <a:p>
+            <a:pPr>
+              <a:spcAft>
+                <a:spcPts val="0"/>
+              </a:spcAft>
+            </a:pPr>
+            <a:r>
+              <a:rPr sz="1000" b="0">
+                <a:solidFill>
+                  <a:srgbClr val="8A93A3"/>
+                </a:solidFill>
+                <a:latin typeface="Inter"/>
+              </a:rPr>
+              <a:t>contested flag in the ledger</a:t>
+            </a:r>
+          </a:p>
+        </p:txBody>
+      </p:sp>
+      <p:sp>
+        <p:nvSpPr>
+          <p:cNvPr id="8" name="Rounded Rectangle 7"/>
+          <p:cNvSpPr/>
+          <p:nvPr/>
+        </p:nvSpPr>
+        <p:spPr>
+          <a:xfrm>
+            <a:off x="9418320" y="3017520"/>
+            <a:ext cx="1920240" cy="1051560"/>
+          </a:xfrm>
+          <a:prstGeom prst="roundRect">
+            <a:avLst/>
+          </a:prstGeom>
+          <a:solidFill>
+            <a:srgbClr val="111420"/>
+          </a:solidFill>
+          <a:ln w="15240">
+            <a:solidFill>
+              <a:srgbClr val="CFA36C"/>
+            </a:solidFill>
+          </a:ln>
+          <a:effectLst/>
+        </p:spPr>
+        <p:style>
+          <a:lnRef idx="1">
+            <a:schemeClr val="accent1"/>
+          </a:lnRef>
+          <a:fillRef idx="3">
+            <a:schemeClr val="accent1"/>
+          </a:fillRef>
+          <a:effectRef idx="2">
+            <a:schemeClr val="accent1"/>
+          </a:effectRef>
+          <a:fontRef idx="minor">
+            <a:schemeClr val="lt1"/>
+          </a:fontRef>
+        </p:style>
+        <p:txBody>
+          <a:bodyPr rtlCol="0" anchor="ctr" wrap="square"/>
+          <a:lstStyle/>
+          <a:p>
+            <a:pPr algn="ctr">
+              <a:spcAft>
+                <a:spcPts val="200"/>
+              </a:spcAft>
+            </a:pPr>
+            <a:r>
+              <a:rPr sz="1300" b="1">
+                <a:solidFill>
+                  <a:srgbClr val="E8ECF4"/>
+                </a:solidFill>
+                <a:latin typeface="Inter"/>
+              </a:rPr>
+              <a:t>policy owner</a:t>
+            </a:r>
+          </a:p>
+          <a:p>
+            <a:pPr>
+              <a:spcAft>
+                <a:spcPts val="0"/>
+              </a:spcAft>
+            </a:pPr>
+            <a:r>
+              <a:rPr sz="1000" b="0">
+                <a:solidFill>
+                  <a:srgbClr val="8A93A3"/>
+                </a:solidFill>
+                <a:latin typeface="Inter"/>
+              </a:rPr>
+              <a:t>gets the split, decides once</a:t>
+            </a:r>
+          </a:p>
+        </p:txBody>
+      </p:sp>
+      <p:cxnSp>
+        <p:nvCxnSpPr>
+          <p:cNvPr id="9" name="Connector 8"/>
+          <p:cNvCxnSpPr/>
+          <p:nvPr/>
+        </p:nvCxnSpPr>
+        <p:spPr>
+          <a:xfrm>
+            <a:off x="3108960" y="3520440"/>
+            <a:ext cx="548640" cy="0"/>
+          </a:xfrm>
+          <a:prstGeom prst="line">
+            <a:avLst/>
+          </a:prstGeom>
+          <a:ln w="20320">
+            <a:solidFill>
+              <a:srgbClr val="828FFF"/>
+            </a:solidFill>
+            <a:tailEnd type="triangle" w="med" len="med"/>
+          </a:ln>
+        </p:spPr>
+        <p:style>
+          <a:lnRef idx="2">
+            <a:schemeClr val="accent1"/>
+          </a:lnRef>
+          <a:fillRef idx="0">
+            <a:schemeClr val="accent1"/>
+          </a:fillRef>
+          <a:effectRef idx="1">
+            <a:schemeClr val="accent1"/>
+          </a:effectRef>
+          <a:fontRef idx="minor">
+            <a:schemeClr val="tx1"/>
+          </a:fontRef>
+        </p:style>
+      </p:cxnSp>
+      <p:cxnSp>
+        <p:nvCxnSpPr>
+          <p:cNvPr id="10" name="Connector 9"/>
+          <p:cNvCxnSpPr/>
+          <p:nvPr/>
+        </p:nvCxnSpPr>
+        <p:spPr>
+          <a:xfrm flipV="1">
+            <a:off x="5943600" y="2651760"/>
+            <a:ext cx="640080" cy="548640"/>
+          </a:xfrm>
+          <a:prstGeom prst="line">
+            <a:avLst/>
+          </a:prstGeom>
+          <a:ln w="20320">
+            <a:solidFill>
+              <a:srgbClr val="828FFF"/>
+            </a:solidFill>
+            <a:tailEnd type="triangle" w="med" len="med"/>
+          </a:ln>
+        </p:spPr>
+        <p:style>
+          <a:lnRef idx="2">
+            <a:schemeClr val="accent1"/>
+          </a:lnRef>
+          <a:fillRef idx="0">
+            <a:schemeClr val="accent1"/>
+          </a:fillRef>
+          <a:effectRef idx="1">
+            <a:schemeClr val="accent1"/>
+          </a:effectRef>
+          <a:fontRef idx="minor">
+            <a:schemeClr val="tx1"/>
+          </a:fontRef>
+        </p:style>
+      </p:cxnSp>
+      <p:cxnSp>
+        <p:nvCxnSpPr>
+          <p:cNvPr id="11" name="Connector 10"/>
+          <p:cNvCxnSpPr/>
+          <p:nvPr/>
+        </p:nvCxnSpPr>
+        <p:spPr>
+          <a:xfrm>
+            <a:off x="5943600" y="3840480"/>
+            <a:ext cx="640080" cy="640080"/>
+          </a:xfrm>
+          <a:prstGeom prst="line">
+            <a:avLst/>
+          </a:prstGeom>
+          <a:ln w="20320">
+            <a:solidFill>
+              <a:srgbClr val="828FFF"/>
+            </a:solidFill>
+            <a:tailEnd type="triangle" w="med" len="med"/>
+          </a:ln>
+        </p:spPr>
+        <p:style>
+          <a:lnRef idx="2">
+            <a:schemeClr val="accent1"/>
+          </a:lnRef>
+          <a:fillRef idx="0">
+            <a:schemeClr val="accent1"/>
+          </a:fillRef>
+          <a:effectRef idx="1">
+            <a:schemeClr val="accent1"/>
+          </a:effectRef>
+          <a:fontRef idx="minor">
+            <a:schemeClr val="tx1"/>
+          </a:fontRef>
+        </p:style>
+      </p:cxnSp>
+      <p:cxnSp>
+        <p:nvCxnSpPr>
+          <p:cNvPr id="12" name="Connector 11"/>
+          <p:cNvCxnSpPr/>
+          <p:nvPr/>
+        </p:nvCxnSpPr>
+        <p:spPr>
+          <a:xfrm>
+            <a:off x="8961120" y="2514600"/>
+            <a:ext cx="594360" cy="502920"/>
+          </a:xfrm>
+          <a:prstGeom prst="line">
+            <a:avLst/>
+          </a:prstGeom>
+          <a:ln w="20320">
+            <a:solidFill>
+              <a:srgbClr val="828FFF"/>
+            </a:solidFill>
+            <a:tailEnd type="triangle" w="med" len="med"/>
+          </a:ln>
+        </p:spPr>
+        <p:style>
+          <a:lnRef idx="2">
+            <a:schemeClr val="accent1"/>
+          </a:lnRef>
+          <a:fillRef idx="0">
+            <a:schemeClr val="accent1"/>
+          </a:fillRef>
+          <a:effectRef idx="1">
+            <a:schemeClr val="accent1"/>
+          </a:effectRef>
+          <a:fontRef idx="minor">
+            <a:schemeClr val="tx1"/>
+          </a:fontRef>
+        </p:style>
+      </p:cxnSp>
+      <p:cxnSp>
+        <p:nvCxnSpPr>
+          <p:cNvPr id="13" name="Connector 12"/>
+          <p:cNvCxnSpPr/>
+          <p:nvPr/>
+        </p:nvCxnSpPr>
+        <p:spPr>
+          <a:xfrm flipV="1">
+            <a:off x="8961120" y="4069080"/>
+            <a:ext cx="594360" cy="502920"/>
+          </a:xfrm>
+          <a:prstGeom prst="line">
+            <a:avLst/>
+          </a:prstGeom>
+          <a:ln w="20320">
+            <a:solidFill>
+              <a:srgbClr val="828FFF"/>
+            </a:solidFill>
+            <a:tailEnd type="triangle" w="med" len="med"/>
+          </a:ln>
+        </p:spPr>
+        <p:style>
+          <a:lnRef idx="2">
+            <a:schemeClr val="accent1"/>
+          </a:lnRef>
+          <a:fillRef idx="0">
+            <a:schemeClr val="accent1"/>
+          </a:fillRef>
+          <a:effectRef idx="1">
+            <a:schemeClr val="accent1"/>
+          </a:effectRef>
+          <a:fontRef idx="minor">
+            <a:schemeClr val="tx1"/>
+          </a:fontRef>
+        </p:style>
+      </p:cxnSp>
+      <p:sp>
+        <p:nvSpPr>
+          <p:cNvPr id="14" name="TextBox 13"/>
           <p:cNvSpPr txBox="1"/>
           <p:nvPr/>
         </p:nvSpPr>
         <p:spPr>
           <a:xfrm>
-            <a:off x="822960" y="1828800"/>
-            <a:ext cx="10424160" cy="4297680"/>
+            <a:off x="822960" y="5806440"/>
+            <a:ext cx="10515600" cy="914400"/>
           </a:xfrm>
           <a:prstGeom prst="rect">
             <a:avLst/>
@@ -5529,126 +5415,17 @@
           <a:p>
             <a:pPr>
               <a:spcAft>
-                <a:spcPts val="1100"/>
-              </a:spcAft>
-            </a:pPr>
-            <a:r>
-              <a:rPr sz="1400" b="1">
-                <a:solidFill>
-                  <a:srgbClr val="E8ECF4"/>
-                </a:solidFill>
-                <a:latin typeface="Inter"/>
-              </a:rPr>
-              <a:t>Transfer it never trained for: </a:t>
-            </a:r>
-            <a:r>
-              <a:rPr sz="1400">
+                <a:spcPts val="600"/>
+              </a:spcAft>
+            </a:pPr>
+            <a:r>
+              <a:rPr sz="1300" b="0">
                 <a:solidFill>
                   <a:srgbClr val="8A93A3"/>
                 </a:solidFill>
                 <a:latin typeface="Inter"/>
               </a:rPr>
-              <a:t>v5 was tuned against gemini-flash only. Unchanged, it scores 12/12 on claude-sonnet and claude-haiku and 11/12 on gemini-pro (n=12 each).</a:t>
-            </a:r>
-          </a:p>
-          <a:p>
-            <a:pPr>
-              <a:spcAft>
-                <a:spcPts val="1100"/>
-              </a:spcAft>
-            </a:pPr>
-            <a:r>
-              <a:rPr sz="1400" b="1">
-                <a:solidFill>
-                  <a:srgbClr val="E8ECF4"/>
-                </a:solidFill>
-                <a:latin typeface="Inter"/>
-              </a:rPr>
-              <a:t>Data authored after the freeze: </a:t>
-            </a:r>
-            <a:r>
-              <a:rPr sz="1400">
-                <a:solidFill>
-                  <a:srgbClr val="8A93A3"/>
-                </a:solidFill>
-                <a:latin typeface="Inter"/>
-              </a:rPr>
-              <a:t>the 64 generated cases did not exist when v5 froze. It sweeps 56/56 on flash, 48/48 on qwen, 46/48 on gemini-pro. Overfit collapses on unseen data; this did not.</a:t>
-            </a:r>
-          </a:p>
-          <a:p>
-            <a:pPr>
-              <a:spcAft>
-                <a:spcPts val="1100"/>
-              </a:spcAft>
-            </a:pPr>
-            <a:r>
-              <a:rPr sz="1400" b="1">
-                <a:solidFill>
-                  <a:srgbClr val="E8ECF4"/>
-                </a:solidFill>
-                <a:latin typeface="Inter"/>
-              </a:rPr>
-              <a:t>Weak columns fail for capacity, not memorization: </a:t>
-            </a:r>
-            <a:r>
-              <a:rPr sz="1400">
-                <a:solidFill>
-                  <a:srgbClr val="8A93A3"/>
-                </a:solidFill>
-                <a:latin typeface="Inter"/>
-              </a:rPr>
-              <a:t>llama trails at every rung, 8/12 on v1 before any tuning existed, 9/12 at v5 with contract 1.00. The ladder never bent toward its failures, and they predate it.</a:t>
-            </a:r>
-          </a:p>
-          <a:p>
-            <a:pPr>
-              <a:spcAft>
-                <a:spcPts val="1100"/>
-              </a:spcAft>
-            </a:pPr>
-            <a:r>
-              <a:rPr sz="1400" b="1">
-                <a:solidFill>
-                  <a:srgbClr val="E8ECF4"/>
-                </a:solidFill>
-                <a:latin typeface="Inter"/>
-              </a:rPr>
-              <a:t>The discipline check: </a:t>
-            </a:r>
-            <a:r>
-              <a:rPr sz="1400">
-                <a:solidFill>
-                  <a:srgbClr val="8A93A3"/>
-                </a:solidFill>
-                <a:latin typeface="Inter"/>
-              </a:rPr>
-              <a:t>v6 was rejected on its own pre-registered bar. An overfitting process chases the suite; this one turned down a better injection score.</a:t>
-            </a:r>
-          </a:p>
-          <a:p>
-            <a:pPr>
-              <a:spcAft>
-                <a:spcPts val="1100"/>
-              </a:spcAft>
-            </a:pPr>
-            <a:r>
-              <a:rPr sz="1400" b="1">
-                <a:solidFill>
-                  <a:srgbClr val="E8ECF4"/>
-                </a:solidFill>
-                <a:latin typeface="Inter"/>
-              </a:rPr>
-              <a:t>Open, stated: </a:t>
-            </a:r>
-            <a:r>
-              <a:rPr sz="1400">
-                <a:solidFill>
-                  <a:srgbClr val="8A93A3"/>
-                </a:solidFill>
-                <a:latin typeface="Inter"/>
-              </a:rPr>
-              <a:t>the true holdout is n=3 (v5: 2/3), too small to certify anything. That is why the gates carry the ship claim and more expert labels is the named blocker.</a:t>
+              <a:t>Same mechanism for sanctions-partial: zero APPROVEs in 23 runs across seven models, so it fails closed and ships contested. The benchmark's job on these cases is to surface the disagreement, not to pick a winner. Given time, this queue becomes a real reviewer surface; the playground already prototypes it.</a:t>
             </a:r>
           </a:p>
         </p:txBody>
@@ -5713,7 +5490,7 @@
                 </a:solidFill>
                 <a:latin typeface="Inter"/>
               </a:rPr>
-              <a:t>PPDAC · ANALYSIS · THE QUEUE</a:t>
+              <a:t>PPDAC · ANALYSIS · POPULATION</a:t>
             </a:r>
           </a:p>
         </p:txBody>
@@ -5752,575 +5529,44 @@
                 </a:solidFill>
                 <a:latin typeface="Inter"/>
               </a:rPr>
-              <a:t>A contested case is routed, not resolved</a:t>
-            </a:r>
-          </a:p>
-        </p:txBody>
-      </p:sp>
-      <p:sp>
-        <p:nvSpPr>
-          <p:cNvPr id="4" name="Rounded Rectangle 3"/>
-          <p:cNvSpPr/>
-          <p:nvPr/>
-        </p:nvSpPr>
-        <p:spPr>
-          <a:xfrm>
-            <a:off x="822960" y="3017520"/>
-            <a:ext cx="2286000" cy="960120"/>
-          </a:xfrm>
-          <a:prstGeom prst="roundRect">
-            <a:avLst/>
-          </a:prstGeom>
-          <a:solidFill>
-            <a:srgbClr val="111420"/>
-          </a:solidFill>
-          <a:ln w="15240">
-            <a:solidFill>
-              <a:srgbClr val="3A3F4E"/>
-            </a:solidFill>
-          </a:ln>
-          <a:effectLst/>
-        </p:spPr>
-        <p:style>
-          <a:lnRef idx="1">
-            <a:schemeClr val="accent1"/>
-          </a:lnRef>
-          <a:fillRef idx="3">
-            <a:schemeClr val="accent1"/>
-          </a:fillRef>
-          <a:effectRef idx="2">
-            <a:schemeClr val="accent1"/>
-          </a:effectRef>
-          <a:fontRef idx="minor">
-            <a:schemeClr val="lt1"/>
-          </a:fontRef>
-        </p:style>
-        <p:txBody>
-          <a:bodyPr rtlCol="0" anchor="ctr" wrap="square"/>
-          <a:lstStyle/>
-          <a:p>
-            <a:pPr algn="ctr">
-              <a:spcAft>
-                <a:spcPts val="200"/>
-              </a:spcAft>
-            </a:pPr>
-            <a:r>
-              <a:rPr sz="1300" b="1">
-                <a:solidFill>
-                  <a:srgbClr val="E8ECF4"/>
-                </a:solidFill>
-                <a:latin typeface="Inter"/>
-              </a:rPr>
-              <a:t>data_quality_flag</a:t>
-            </a:r>
-          </a:p>
-          <a:p>
-            <a:pPr>
-              <a:spcAft>
-                <a:spcPts val="0"/>
-              </a:spcAft>
-            </a:pPr>
-            <a:r>
-              <a:rPr sz="1000" b="0">
-                <a:solidFill>
-                  <a:srgbClr val="8A93A3"/>
-                </a:solidFill>
-                <a:latin typeface="Inter"/>
-              </a:rPr>
-              <a:t>generated archetype, 28 runs</a:t>
-            </a:r>
-          </a:p>
-        </p:txBody>
-      </p:sp>
-      <p:sp>
-        <p:nvSpPr>
-          <p:cNvPr id="5" name="Rounded Rectangle 4"/>
-          <p:cNvSpPr/>
-          <p:nvPr/>
-        </p:nvSpPr>
-        <p:spPr>
-          <a:xfrm>
-            <a:off x="3657600" y="3017520"/>
-            <a:ext cx="2286000" cy="960120"/>
-          </a:xfrm>
-          <a:prstGeom prst="roundRect">
-            <a:avLst/>
-          </a:prstGeom>
-          <a:solidFill>
-            <a:srgbClr val="111420"/>
-          </a:solidFill>
-          <a:ln w="15240">
-            <a:solidFill>
-              <a:srgbClr val="828FFF"/>
-            </a:solidFill>
-          </a:ln>
-          <a:effectLst/>
-        </p:spPr>
-        <p:style>
-          <a:lnRef idx="1">
-            <a:schemeClr val="accent1"/>
-          </a:lnRef>
-          <a:fillRef idx="3">
-            <a:schemeClr val="accent1"/>
-          </a:fillRef>
-          <a:effectRef idx="2">
-            <a:schemeClr val="accent1"/>
-          </a:effectRef>
-          <a:fontRef idx="minor">
-            <a:schemeClr val="lt1"/>
-          </a:fontRef>
-        </p:style>
-        <p:txBody>
-          <a:bodyPr rtlCol="0" anchor="ctr" wrap="square"/>
-          <a:lstStyle/>
-          <a:p>
-            <a:pPr algn="ctr">
-              <a:spcAft>
-                <a:spcPts val="200"/>
-              </a:spcAft>
-            </a:pPr>
-            <a:r>
-              <a:rPr sz="1300" b="1">
-                <a:solidFill>
-                  <a:srgbClr val="E8ECF4"/>
-                </a:solidFill>
-                <a:latin typeface="Inter"/>
-              </a:rPr>
-              <a:t>seven models</a:t>
-            </a:r>
-          </a:p>
-          <a:p>
-            <a:pPr>
-              <a:spcAft>
-                <a:spcPts val="0"/>
-              </a:spcAft>
-            </a:pPr>
-            <a:r>
-              <a:rPr sz="1000" b="0">
-                <a:solidFill>
-                  <a:srgbClr val="8A93A3"/>
-                </a:solidFill>
-                <a:latin typeface="Inter"/>
-              </a:rPr>
-              <a:t>split 20 HOLD / 8 REJECT</a:t>
-            </a:r>
-          </a:p>
-        </p:txBody>
-      </p:sp>
-      <p:sp>
-        <p:nvSpPr>
-          <p:cNvPr id="6" name="Rounded Rectangle 5"/>
-          <p:cNvSpPr/>
-          <p:nvPr/>
-        </p:nvSpPr>
-        <p:spPr>
-          <a:xfrm>
-            <a:off x="6583680" y="2011680"/>
-            <a:ext cx="2377440" cy="960120"/>
-          </a:xfrm>
-          <a:prstGeom prst="roundRect">
-            <a:avLst/>
-          </a:prstGeom>
-          <a:solidFill>
-            <a:srgbClr val="111420"/>
-          </a:solidFill>
-          <a:ln w="15240">
-            <a:solidFill>
-              <a:srgbClr val="F87171"/>
-            </a:solidFill>
-          </a:ln>
-          <a:effectLst/>
-        </p:spPr>
-        <p:style>
-          <a:lnRef idx="1">
-            <a:schemeClr val="accent1"/>
-          </a:lnRef>
-          <a:fillRef idx="3">
-            <a:schemeClr val="accent1"/>
-          </a:fillRef>
-          <a:effectRef idx="2">
-            <a:schemeClr val="accent1"/>
-          </a:effectRef>
-          <a:fontRef idx="minor">
-            <a:schemeClr val="lt1"/>
-          </a:fontRef>
-        </p:style>
-        <p:txBody>
-          <a:bodyPr rtlCol="0" anchor="ctr" wrap="square"/>
-          <a:lstStyle/>
-          <a:p>
-            <a:pPr algn="ctr">
-              <a:spcAft>
-                <a:spcPts val="200"/>
-              </a:spcAft>
-            </a:pPr>
-            <a:r>
-              <a:rPr sz="1300" b="1">
-                <a:solidFill>
-                  <a:srgbClr val="E8ECF4"/>
-                </a:solidFill>
-                <a:latin typeface="Inter"/>
-              </a:rPr>
-              <a:t>not a model error</a:t>
-            </a:r>
-          </a:p>
-          <a:p>
-            <a:pPr>
-              <a:spcAft>
-                <a:spcPts val="0"/>
-              </a:spcAft>
-            </a:pPr>
-            <a:r>
-              <a:rPr sz="1000" b="0">
-                <a:solidFill>
-                  <a:srgbClr val="8A93A3"/>
-                </a:solidFill>
-                <a:latin typeface="Inter"/>
-              </a:rPr>
-              <a:t>POLICY.md underdetermines it</a:t>
-            </a:r>
-          </a:p>
-        </p:txBody>
-      </p:sp>
-      <p:sp>
-        <p:nvSpPr>
-          <p:cNvPr id="7" name="Rounded Rectangle 6"/>
-          <p:cNvSpPr/>
-          <p:nvPr/>
-        </p:nvSpPr>
-        <p:spPr>
-          <a:xfrm>
-            <a:off x="6583680" y="4114800"/>
-            <a:ext cx="2377440" cy="960120"/>
-          </a:xfrm>
-          <a:prstGeom prst="roundRect">
-            <a:avLst/>
-          </a:prstGeom>
-          <a:solidFill>
-            <a:srgbClr val="111420"/>
-          </a:solidFill>
-          <a:ln w="15240">
-            <a:solidFill>
-              <a:srgbClr val="3A3F4E"/>
-            </a:solidFill>
-          </a:ln>
-          <a:effectLst/>
-        </p:spPr>
-        <p:style>
-          <a:lnRef idx="1">
-            <a:schemeClr val="accent1"/>
-          </a:lnRef>
-          <a:fillRef idx="3">
-            <a:schemeClr val="accent1"/>
-          </a:fillRef>
-          <a:effectRef idx="2">
-            <a:schemeClr val="accent1"/>
-          </a:effectRef>
-          <a:fontRef idx="minor">
-            <a:schemeClr val="lt1"/>
-          </a:fontRef>
-        </p:style>
-        <p:txBody>
-          <a:bodyPr rtlCol="0" anchor="ctr" wrap="square"/>
-          <a:lstStyle/>
-          <a:p>
-            <a:pPr algn="ctr">
-              <a:spcAft>
-                <a:spcPts val="200"/>
-              </a:spcAft>
-            </a:pPr>
-            <a:r>
-              <a:rPr sz="1300" b="1">
-                <a:solidFill>
-                  <a:srgbClr val="E8ECF4"/>
-                </a:solidFill>
-                <a:latin typeface="Inter"/>
-              </a:rPr>
-              <a:t>no score assigned</a:t>
-            </a:r>
-          </a:p>
-          <a:p>
-            <a:pPr>
-              <a:spcAft>
-                <a:spcPts val="0"/>
-              </a:spcAft>
-            </a:pPr>
-            <a:r>
-              <a:rPr sz="1000" b="0">
-                <a:solidFill>
-                  <a:srgbClr val="8A93A3"/>
-                </a:solidFill>
-                <a:latin typeface="Inter"/>
-              </a:rPr>
-              <a:t>contested flag in the ledger</a:t>
-            </a:r>
-          </a:p>
-        </p:txBody>
-      </p:sp>
-      <p:sp>
-        <p:nvSpPr>
-          <p:cNvPr id="8" name="Rounded Rectangle 7"/>
-          <p:cNvSpPr/>
-          <p:nvPr/>
-        </p:nvSpPr>
-        <p:spPr>
-          <a:xfrm>
-            <a:off x="9418320" y="3017520"/>
-            <a:ext cx="1920240" cy="1051560"/>
-          </a:xfrm>
-          <a:prstGeom prst="roundRect">
-            <a:avLst/>
-          </a:prstGeom>
-          <a:solidFill>
-            <a:srgbClr val="111420"/>
-          </a:solidFill>
-          <a:ln w="15240">
-            <a:solidFill>
-              <a:srgbClr val="CFA36C"/>
-            </a:solidFill>
-          </a:ln>
-          <a:effectLst/>
-        </p:spPr>
-        <p:style>
-          <a:lnRef idx="1">
-            <a:schemeClr val="accent1"/>
-          </a:lnRef>
-          <a:fillRef idx="3">
-            <a:schemeClr val="accent1"/>
-          </a:fillRef>
-          <a:effectRef idx="2">
-            <a:schemeClr val="accent1"/>
-          </a:effectRef>
-          <a:fontRef idx="minor">
-            <a:schemeClr val="lt1"/>
-          </a:fontRef>
-        </p:style>
-        <p:txBody>
-          <a:bodyPr rtlCol="0" anchor="ctr" wrap="square"/>
-          <a:lstStyle/>
-          <a:p>
-            <a:pPr algn="ctr">
-              <a:spcAft>
-                <a:spcPts val="200"/>
-              </a:spcAft>
-            </a:pPr>
-            <a:r>
-              <a:rPr sz="1300" b="1">
-                <a:solidFill>
-                  <a:srgbClr val="E8ECF4"/>
-                </a:solidFill>
-                <a:latin typeface="Inter"/>
-              </a:rPr>
-              <a:t>policy owner</a:t>
-            </a:r>
-          </a:p>
-          <a:p>
-            <a:pPr>
-              <a:spcAft>
-                <a:spcPts val="0"/>
-              </a:spcAft>
-            </a:pPr>
-            <a:r>
-              <a:rPr sz="1000" b="0">
-                <a:solidFill>
-                  <a:srgbClr val="8A93A3"/>
-                </a:solidFill>
-                <a:latin typeface="Inter"/>
-              </a:rPr>
-              <a:t>gets the split, decides once</a:t>
-            </a:r>
-          </a:p>
-        </p:txBody>
-      </p:sp>
-      <p:cxnSp>
-        <p:nvCxnSpPr>
-          <p:cNvPr id="9" name="Connector 8"/>
-          <p:cNvCxnSpPr/>
-          <p:nvPr/>
-        </p:nvCxnSpPr>
-        <p:spPr>
-          <a:xfrm>
-            <a:off x="3108960" y="3520440"/>
-            <a:ext cx="548640" cy="0"/>
-          </a:xfrm>
-          <a:prstGeom prst="line">
-            <a:avLst/>
-          </a:prstGeom>
-          <a:ln w="20320">
-            <a:solidFill>
-              <a:srgbClr val="828FFF"/>
-            </a:solidFill>
-            <a:tailEnd type="triangle" w="med" len="med"/>
-          </a:ln>
-        </p:spPr>
-        <p:style>
-          <a:lnRef idx="2">
-            <a:schemeClr val="accent1"/>
-          </a:lnRef>
-          <a:fillRef idx="0">
-            <a:schemeClr val="accent1"/>
-          </a:fillRef>
-          <a:effectRef idx="1">
-            <a:schemeClr val="accent1"/>
-          </a:effectRef>
-          <a:fontRef idx="minor">
-            <a:schemeClr val="tx1"/>
-          </a:fontRef>
-        </p:style>
-      </p:cxnSp>
-      <p:cxnSp>
-        <p:nvCxnSpPr>
-          <p:cNvPr id="10" name="Connector 9"/>
-          <p:cNvCxnSpPr/>
-          <p:nvPr/>
-        </p:nvCxnSpPr>
-        <p:spPr>
-          <a:xfrm flipV="1">
-            <a:off x="5943600" y="2651760"/>
-            <a:ext cx="640080" cy="548640"/>
-          </a:xfrm>
-          <a:prstGeom prst="line">
-            <a:avLst/>
-          </a:prstGeom>
-          <a:ln w="20320">
-            <a:solidFill>
-              <a:srgbClr val="828FFF"/>
-            </a:solidFill>
-            <a:tailEnd type="triangle" w="med" len="med"/>
-          </a:ln>
-        </p:spPr>
-        <p:style>
-          <a:lnRef idx="2">
-            <a:schemeClr val="accent1"/>
-          </a:lnRef>
-          <a:fillRef idx="0">
-            <a:schemeClr val="accent1"/>
-          </a:fillRef>
-          <a:effectRef idx="1">
-            <a:schemeClr val="accent1"/>
-          </a:effectRef>
-          <a:fontRef idx="minor">
-            <a:schemeClr val="tx1"/>
-          </a:fontRef>
-        </p:style>
-      </p:cxnSp>
-      <p:cxnSp>
-        <p:nvCxnSpPr>
-          <p:cNvPr id="11" name="Connector 10"/>
-          <p:cNvCxnSpPr/>
-          <p:nvPr/>
-        </p:nvCxnSpPr>
-        <p:spPr>
-          <a:xfrm>
-            <a:off x="5943600" y="3840480"/>
-            <a:ext cx="640080" cy="640080"/>
-          </a:xfrm>
-          <a:prstGeom prst="line">
-            <a:avLst/>
-          </a:prstGeom>
-          <a:ln w="20320">
-            <a:solidFill>
-              <a:srgbClr val="828FFF"/>
-            </a:solidFill>
-            <a:tailEnd type="triangle" w="med" len="med"/>
-          </a:ln>
-        </p:spPr>
-        <p:style>
-          <a:lnRef idx="2">
-            <a:schemeClr val="accent1"/>
-          </a:lnRef>
-          <a:fillRef idx="0">
-            <a:schemeClr val="accent1"/>
-          </a:fillRef>
-          <a:effectRef idx="1">
-            <a:schemeClr val="accent1"/>
-          </a:effectRef>
-          <a:fontRef idx="minor">
-            <a:schemeClr val="tx1"/>
-          </a:fontRef>
-        </p:style>
-      </p:cxnSp>
-      <p:cxnSp>
-        <p:nvCxnSpPr>
-          <p:cNvPr id="12" name="Connector 11"/>
-          <p:cNvCxnSpPr/>
-          <p:nvPr/>
-        </p:nvCxnSpPr>
-        <p:spPr>
-          <a:xfrm>
-            <a:off x="8961120" y="2514600"/>
-            <a:ext cx="594360" cy="502920"/>
-          </a:xfrm>
-          <a:prstGeom prst="line">
-            <a:avLst/>
-          </a:prstGeom>
-          <a:ln w="20320">
-            <a:solidFill>
-              <a:srgbClr val="828FFF"/>
-            </a:solidFill>
-            <a:tailEnd type="triangle" w="med" len="med"/>
-          </a:ln>
-        </p:spPr>
-        <p:style>
-          <a:lnRef idx="2">
-            <a:schemeClr val="accent1"/>
-          </a:lnRef>
-          <a:fillRef idx="0">
-            <a:schemeClr val="accent1"/>
-          </a:fillRef>
-          <a:effectRef idx="1">
-            <a:schemeClr val="accent1"/>
-          </a:effectRef>
-          <a:fontRef idx="minor">
-            <a:schemeClr val="tx1"/>
-          </a:fontRef>
-        </p:style>
-      </p:cxnSp>
-      <p:cxnSp>
-        <p:nvCxnSpPr>
-          <p:cNvPr id="13" name="Connector 12"/>
-          <p:cNvCxnSpPr/>
-          <p:nvPr/>
-        </p:nvCxnSpPr>
-        <p:spPr>
-          <a:xfrm flipV="1">
-            <a:off x="8961120" y="4069080"/>
-            <a:ext cx="594360" cy="502920"/>
-          </a:xfrm>
-          <a:prstGeom prst="line">
-            <a:avLst/>
-          </a:prstGeom>
-          <a:ln w="20320">
-            <a:solidFill>
-              <a:srgbClr val="828FFF"/>
-            </a:solidFill>
-            <a:tailEnd type="triangle" w="med" len="med"/>
-          </a:ln>
-        </p:spPr>
-        <p:style>
-          <a:lnRef idx="2">
-            <a:schemeClr val="accent1"/>
-          </a:lnRef>
-          <a:fillRef idx="0">
-            <a:schemeClr val="accent1"/>
-          </a:fillRef>
-          <a:effectRef idx="1">
-            <a:schemeClr val="accent1"/>
-          </a:effectRef>
-          <a:fontRef idx="minor">
-            <a:schemeClr val="tx1"/>
-          </a:fontRef>
-        </p:style>
-      </p:cxnSp>
-      <p:sp>
-        <p:nvSpPr>
-          <p:cNvPr id="14" name="TextBox 13"/>
+              <a:t>A million-case simulation on measured kernels</a:t>
+            </a:r>
+          </a:p>
+        </p:txBody>
+      </p:sp>
+      <p:pic>
+        <p:nvPicPr>
+          <p:cNvPr id="4" name="Picture 3" descr="population_sim.png"/>
+          <p:cNvPicPr>
+            <a:picLocks noChangeAspect="1"/>
+          </p:cNvPicPr>
+          <p:nvPr/>
+        </p:nvPicPr>
+        <p:blipFill>
+          <a:blip r:embed="rId2"/>
+          <a:stretch>
+            <a:fillRect/>
+          </a:stretch>
+        </p:blipFill>
+        <p:spPr>
+          <a:xfrm>
+            <a:off x="822960" y="1920240"/>
+            <a:ext cx="6733309" cy="3291840"/>
+          </a:xfrm>
+          <a:prstGeom prst="rect">
+            <a:avLst/>
+          </a:prstGeom>
+        </p:spPr>
+      </p:pic>
+      <p:sp>
+        <p:nvSpPr>
+          <p:cNvPr id="5" name="TextBox 4"/>
           <p:cNvSpPr txBox="1"/>
           <p:nvPr/>
         </p:nvSpPr>
         <p:spPr>
           <a:xfrm>
-            <a:off x="822960" y="5806440"/>
+            <a:off x="822960" y="5577840"/>
             <a:ext cx="10515600" cy="914400"/>
           </a:xfrm>
           <a:prstGeom prst="rect">
@@ -6346,7 +5592,7 @@
                 </a:solidFill>
                 <a:latin typeface="Inter"/>
               </a:rPr>
-              <a:t>Same mechanism for sanctions-partial: zero APPROVEs in 23 runs across seven models, so it fails closed and ships contested. The benchmark's job on these cases is to surface the disagreement, not to pick a winner. Given time, this queue becomes a real reviewer surface; the playground already prototypes it.</a:t>
+              <a:t>Behavior measured from the ledger; prevalence and exposure are named, swept assumptions. At 0.5% fraud, v1 costs $4,594/1k matrix-priced and $12,069/1k exposure-priced; rare large events dominate.</a:t>
             </a:r>
           </a:p>
         </p:txBody>
@@ -6411,7 +5657,7 @@
                 </a:solidFill>
                 <a:latin typeface="Inter"/>
               </a:rPr>
-              <a:t>PPDAC · ANALYSIS · POPULATION</a:t>
+              <a:t>ADVERSARIAL REVIEWS, ANSWERED WITH RUNS</a:t>
             </a:r>
           </a:p>
         </p:txBody>
@@ -6450,45 +5696,21 @@
                 </a:solidFill>
                 <a:latin typeface="Inter"/>
               </a:rPr>
-              <a:t>A million-case simulation on measured kernels</a:t>
-            </a:r>
-          </a:p>
-        </p:txBody>
-      </p:sp>
-      <p:pic>
-        <p:nvPicPr>
-          <p:cNvPr id="4" name="Picture 3" descr="population_sim.png"/>
-          <p:cNvPicPr>
-            <a:picLocks noChangeAspect="1"/>
-          </p:cNvPicPr>
-          <p:nvPr/>
-        </p:nvPicPr>
-        <p:blipFill>
-          <a:blip r:embed="rId2"/>
-          <a:stretch>
-            <a:fillRect/>
-          </a:stretch>
-        </p:blipFill>
-        <p:spPr>
-          <a:xfrm>
-            <a:off x="822960" y="1920240"/>
-            <a:ext cx="6733309" cy="3291840"/>
-          </a:xfrm>
-          <a:prstGeom prst="rect">
-            <a:avLst/>
-          </a:prstGeom>
-        </p:spPr>
-      </p:pic>
-      <p:sp>
-        <p:nvSpPr>
-          <p:cNvPr id="5" name="TextBox 4"/>
+              <a:t>The gate does not bend on deadline day</a:t>
+            </a:r>
+          </a:p>
+        </p:txBody>
+      </p:sp>
+      <p:sp>
+        <p:nvSpPr>
+          <p:cNvPr id="4" name="TextBox 3"/>
           <p:cNvSpPr txBox="1"/>
           <p:nvPr/>
         </p:nvSpPr>
         <p:spPr>
           <a:xfrm>
-            <a:off x="822960" y="5577840"/>
-            <a:ext cx="10515600" cy="914400"/>
+            <a:off x="822960" y="2011680"/>
+            <a:ext cx="10424160" cy="3840480"/>
           </a:xfrm>
           <a:prstGeom prst="rect">
             <a:avLst/>
@@ -6503,17 +5725,76 @@
           <a:p>
             <a:pPr>
               <a:spcAft>
-                <a:spcPts val="600"/>
-              </a:spcAft>
-            </a:pPr>
-            <a:r>
-              <a:rPr sz="1300" b="0">
+                <a:spcPts val="1600"/>
+              </a:spcAft>
+            </a:pPr>
+            <a:r>
+              <a:rPr sz="1600" b="1">
+                <a:solidFill>
+                  <a:srgbClr val="E8ECF4"/>
+                </a:solidFill>
+                <a:latin typeface="Inter"/>
+              </a:rPr>
+              <a:t>Refuted by probes: </a:t>
+            </a:r>
+            <a:r>
+              <a:rPr sz="1600">
                 <a:solidFill>
                   <a:srgbClr val="8A93A3"/>
                 </a:solidFill>
                 <a:latin typeface="Inter"/>
               </a:rPr>
-              <a:t>Behavior measured from the ledger; prevalence and exposure are named, swept assumptions. At 0.5% fraud, v1 costs $4,594/1k matrix-priced and $12,069/1k exposure-priced; rare large events dominate.</a:t>
+              <a:t>precomputed-false is never exculpatory (4/4); the "you survive 108 by luck" perturbation HOLDs 4/4.</a:t>
+            </a:r>
+          </a:p>
+          <a:p>
+            <a:pPr>
+              <a:spcAft>
+                <a:spcPts val="1600"/>
+              </a:spcAft>
+            </a:pPr>
+            <a:r>
+              <a:rPr sz="1600" b="1">
+                <a:solidFill>
+                  <a:srgbClr val="E8ECF4"/>
+                </a:solidFill>
+                <a:latin typeface="Inter"/>
+              </a:rPr>
+              <a:t>Half right: </a:t>
+            </a:r>
+            <a:r>
+              <a:rPr sz="1600">
+                <a:solidFill>
+                  <a:srgbClr val="8A93A3"/>
+                </a:solidFill>
+                <a:latin typeface="Inter"/>
+              </a:rPr>
+              <a:t>the sanctions middle case fails CLOSED, not open: zero APPROVEs in 23 runs across seven models; the verdict choice ships contested.</a:t>
+            </a:r>
+          </a:p>
+          <a:p>
+            <a:pPr>
+              <a:spcAft>
+                <a:spcPts val="1600"/>
+              </a:spcAft>
+            </a:pPr>
+            <a:r>
+              <a:rPr sz="1600" b="1">
+                <a:solidFill>
+                  <a:srgbClr val="E8ECF4"/>
+                </a:solidFill>
+                <a:latin typeface="Inter"/>
+              </a:rPr>
+              <a:t>v6, the injection line: </a:t>
+            </a:r>
+            <a:r>
+              <a:rPr sz="1600">
+                <a:solidFill>
+                  <a:srgbClr val="8A93A3"/>
+                </a:solidFill>
+                <a:latin typeface="Inter"/>
+              </a:rPr>
+              <a:t>resists 19/20 where v5 sits at 5/9, and was rejected anyway: suite 11/12 against a pre-registered 12/12 bar. It ships as the tested next rung, not as the prompt.</a:t>
             </a:r>
           </a:p>
         </p:txBody>
@@ -7315,7 +6596,7 @@
                 </a:solidFill>
                 <a:latin typeface="Inter"/>
               </a:rPr>
-              <a:t>ADVERSARIAL REVIEWS, ANSWERED WITH RUNS</a:t>
+              <a:t>PPDAC · CONCLUSION</a:t>
             </a:r>
           </a:p>
         </p:txBody>
@@ -7354,7 +6635,7 @@
                 </a:solidFill>
                 <a:latin typeface="Inter"/>
               </a:rPr>
-              <a:t>The gate does not bend on deadline day</a:t>
+              <a:t>Ship v5 + gemini-flash, and say what that means</a:t>
             </a:r>
           </a:p>
         </p:txBody>
@@ -7367,8 +6648,8 @@
         </p:nvSpPr>
         <p:spPr>
           <a:xfrm>
-            <a:off x="822960" y="2011680"/>
-            <a:ext cx="10424160" cy="3840480"/>
+            <a:off x="822960" y="2103120"/>
+            <a:ext cx="10424160" cy="2926080"/>
           </a:xfrm>
           <a:prstGeom prst="rect">
             <a:avLst/>
@@ -7383,17 +6664,17 @@
           <a:p>
             <a:pPr>
               <a:spcAft>
-                <a:spcPts val="1600"/>
-              </a:spcAft>
-            </a:pPr>
-            <a:r>
-              <a:rPr sz="1600" b="1">
-                <a:solidFill>
-                  <a:srgbClr val="E8ECF4"/>
-                </a:solidFill>
-                <a:latin typeface="Inter"/>
-              </a:rPr>
-              <a:t>Refuted by probes: </a:t>
+                <a:spcPts val="1400"/>
+              </a:spcAft>
+            </a:pPr>
+            <a:r>
+              <a:rPr sz="1500" b="1">
+                <a:solidFill>
+                  <a:srgbClr val="4ADE80"/>
+                </a:solidFill>
+                <a:latin typeface="Consolas"/>
+              </a:rPr>
+              <a:t>CERTIFIED     </a:t>
             </a:r>
             <a:r>
               <a:rPr sz="1600">
@@ -7402,23 +6683,23 @@
                 </a:solidFill>
                 <a:latin typeface="Inter"/>
               </a:rPr>
-              <a:t>precomputed-false is never exculpatory (4/4); the "you survive 108 by luck" perturbation HOLDs 4/4.</a:t>
-            </a:r>
-          </a:p>
-          <a:p>
-            <a:pPr>
-              <a:spcAft>
-                <a:spcPts val="1600"/>
-              </a:spcAft>
-            </a:pPr>
-            <a:r>
-              <a:rPr sz="1600" b="1">
-                <a:solidFill>
-                  <a:srgbClr val="E8ECF4"/>
-                </a:solidFill>
-                <a:latin typeface="Inter"/>
-              </a:rPr>
-              <a:t>Half right: </a:t>
+              <a:t>gate recall 1.0 on every ranked cell; contract at floor everywhere ranked</a:t>
+            </a:r>
+          </a:p>
+          <a:p>
+            <a:pPr>
+              <a:spcAft>
+                <a:spcPts val="1400"/>
+              </a:spcAft>
+            </a:pPr>
+            <a:r>
+              <a:rPr sz="1500" b="1">
+                <a:solidFill>
+                  <a:srgbClr val="828FFF"/>
+                </a:solidFill>
+                <a:latin typeface="Consolas"/>
+              </a:rPr>
+              <a:t>SUGGESTED     </a:t>
             </a:r>
             <a:r>
               <a:rPr sz="1600">
@@ -7427,23 +6708,23 @@
                 </a:solidFill>
                 <a:latin typeface="Inter"/>
               </a:rPr>
-              <a:t>the sanctions middle case fails CLOSED, not open: zero APPROVEs in 23 runs across seven models; the verdict choice ships contested.</a:t>
-            </a:r>
-          </a:p>
-          <a:p>
-            <a:pPr>
-              <a:spcAft>
-                <a:spcPts val="1600"/>
-              </a:spcAft>
-            </a:pPr>
-            <a:r>
-              <a:rPr sz="1600" b="1">
-                <a:solidFill>
-                  <a:srgbClr val="E8ECF4"/>
-                </a:solidFill>
-                <a:latin typeface="Inter"/>
-              </a:rPr>
-              <a:t>v6, the injection line: </a:t>
+              <a:t>12/12 with Wilson floor 74%; holdout n=3; the ladder's edge at ~3:1 posterior odds</a:t>
+            </a:r>
+          </a:p>
+          <a:p>
+            <a:pPr>
+              <a:spcAft>
+                <a:spcPts val="1400"/>
+              </a:spcAft>
+            </a:pPr>
+            <a:r>
+              <a:rPr sz="1500" b="1">
+                <a:solidFill>
+                  <a:srgbClr val="F87171"/>
+                </a:solidFill>
+                <a:latin typeface="Consolas"/>
+              </a:rPr>
+              <a:t>DECORATIVE    </a:t>
             </a:r>
             <a:r>
               <a:rPr sz="1600">
@@ -7452,7 +6733,46 @@
                 </a:solidFill>
                 <a:latin typeface="Inter"/>
               </a:rPr>
-              <a:t>resists 19/20 where v5 sits at 5/9, and was rejected anyway: suite 11/12 against a pre-registered 12/12 bar. It ships as the tested next rung, not as the prompt.</a:t>
+              <a:t>verbalized confidence; flash-as-judge</a:t>
+            </a:r>
+          </a:p>
+        </p:txBody>
+      </p:sp>
+      <p:sp>
+        <p:nvSpPr>
+          <p:cNvPr id="5" name="TextBox 4"/>
+          <p:cNvSpPr txBox="1"/>
+          <p:nvPr/>
+        </p:nvSpPr>
+        <p:spPr>
+          <a:xfrm>
+            <a:off x="822960" y="5212080"/>
+            <a:ext cx="10515600" cy="914400"/>
+          </a:xfrm>
+          <a:prstGeom prst="rect">
+            <a:avLst/>
+          </a:prstGeom>
+          <a:noFill/>
+        </p:spPr>
+        <p:txBody>
+          <a:bodyPr wrap="square">
+            <a:spAutoFit/>
+          </a:bodyPr>
+          <a:lstStyle/>
+          <a:p>
+            <a:pPr>
+              <a:spcAft>
+                <a:spcPts val="600"/>
+              </a:spcAft>
+            </a:pPr>
+            <a:r>
+              <a:rPr sz="1300" b="0">
+                <a:solidFill>
+                  <a:srgbClr val="8A93A3"/>
+                </a:solidFill>
+                <a:latin typeface="Inter"/>
+              </a:rPr>
+              <a:t>Every number triggers an action or it is just reporting: gates green = ship; flip or contested split = hold and route to a human; tripwire = roll back. The $0 is a point estimate; n=12 cannot rule out ~$530k/1k worst-class. The gates carry the claim.</a:t>
             </a:r>
           </a:p>
         </p:txBody>
@@ -7517,7 +6837,7 @@
                 </a:solidFill>
                 <a:latin typeface="Inter"/>
               </a:rPr>
-              <a:t>PPDAC · CONCLUSION</a:t>
+              <a:t>THE BOUNDARY, DRAWN ON PURPOSE</a:t>
             </a:r>
           </a:p>
         </p:txBody>
@@ -7556,7 +6876,7 @@
                 </a:solidFill>
                 <a:latin typeface="Inter"/>
               </a:rPr>
-              <a:t>Ship v5 + gemini-flash, and say what that means</a:t>
+              <a:t>Out of scope, and what I'd do next given time</a:t>
             </a:r>
           </a:p>
         </p:txBody>
@@ -7569,8 +6889,8 @@
         </p:nvSpPr>
         <p:spPr>
           <a:xfrm>
-            <a:off x="822960" y="2103120"/>
-            <a:ext cx="10424160" cy="2926080"/>
+            <a:off x="822960" y="1828800"/>
+            <a:ext cx="5303520" cy="4389120"/>
           </a:xfrm>
           <a:prstGeom prst="rect">
             <a:avLst/>
@@ -7585,76 +6905,142 @@
           <a:p>
             <a:pPr>
               <a:spcAft>
-                <a:spcPts val="1400"/>
-              </a:spcAft>
-            </a:pPr>
-            <a:r>
-              <a:rPr sz="1500" b="1">
-                <a:solidFill>
-                  <a:srgbClr val="4ADE80"/>
-                </a:solidFill>
-                <a:latin typeface="Consolas"/>
-              </a:rPr>
-              <a:t>CERTIFIED     </a:t>
-            </a:r>
-            <a:r>
-              <a:rPr sz="1600">
+                <a:spcPts val="1000"/>
+              </a:spcAft>
+            </a:pPr>
+            <a:r>
+              <a:rPr sz="1200" b="1">
+                <a:solidFill>
+                  <a:srgbClr val="828FFF"/>
+                </a:solidFill>
+                <a:latin typeface="Inter"/>
+              </a:rPr>
+              <a:t>DELIBERATELY OUT OF SCOPE</a:t>
+            </a:r>
+          </a:p>
+          <a:p>
+            <a:pPr>
+              <a:spcAft>
+                <a:spcPts val="800"/>
+              </a:spcAft>
+            </a:pPr>
+            <a:r>
+              <a:rPr sz="1200" b="1">
+                <a:solidFill>
+                  <a:srgbClr val="E8ECF4"/>
+                </a:solidFill>
+                <a:latin typeface="Inter"/>
+              </a:rPr>
+              <a:t>Tools and skills: </a:t>
+            </a:r>
+            <a:r>
+              <a:rPr sz="1200">
                 <a:solidFill>
                   <a:srgbClr val="8A93A3"/>
                 </a:solidFill>
                 <a:latin typeface="Inter"/>
               </a:rPr>
-              <a:t>gate recall 1.0 on every ranked cell; contract at floor everywhere ranked</a:t>
-            </a:r>
-          </a:p>
-          <a:p>
-            <a:pPr>
-              <a:spcAft>
-                <a:spcPts val="1400"/>
-              </a:spcAft>
-            </a:pPr>
-            <a:r>
-              <a:rPr sz="1500" b="1">
-                <a:solidFill>
-                  <a:srgbClr val="828FFF"/>
-                </a:solidFill>
-                <a:latin typeface="Consolas"/>
-              </a:rPr>
-              <a:t>SUGGESTED     </a:t>
-            </a:r>
-            <a:r>
-              <a:rPr sz="1600">
+              <a:t>the agent decides from the dossier alone; no function calling, no retrieval. Tools change the eval surface, so they get their own arm, not a patch.</a:t>
+            </a:r>
+          </a:p>
+          <a:p>
+            <a:pPr>
+              <a:spcAft>
+                <a:spcPts val="800"/>
+              </a:spcAft>
+            </a:pPr>
+            <a:r>
+              <a:rPr sz="1200" b="1">
+                <a:solidFill>
+                  <a:srgbClr val="E8ECF4"/>
+                </a:solidFill>
+                <a:latin typeface="Inter"/>
+              </a:rPr>
+              <a:t>MCP integrations: </a:t>
+            </a:r>
+            <a:r>
+              <a:rPr sz="1200">
                 <a:solidFill>
                   <a:srgbClr val="8A93A3"/>
                 </a:solidFill>
                 <a:latin typeface="Inter"/>
               </a:rPr>
-              <a:t>12/12 with Wilson floor 74%; holdout n=3; the ladder's edge at ~3:1 posterior odds</a:t>
-            </a:r>
-          </a:p>
-          <a:p>
-            <a:pPr>
-              <a:spcAft>
-                <a:spcPts val="1400"/>
-              </a:spcAft>
-            </a:pPr>
-            <a:r>
-              <a:rPr sz="1500" b="1">
-                <a:solidFill>
-                  <a:srgbClr val="F87171"/>
-                </a:solidFill>
-                <a:latin typeface="Consolas"/>
-              </a:rPr>
-              <a:t>DECORATIVE    </a:t>
-            </a:r>
-            <a:r>
-              <a:rPr sz="1600">
+              <a:t>no external context servers; every input is the frozen case file, which keeps runs reproducible.</a:t>
+            </a:r>
+          </a:p>
+          <a:p>
+            <a:pPr>
+              <a:spcAft>
+                <a:spcPts val="800"/>
+              </a:spcAft>
+            </a:pPr>
+            <a:r>
+              <a:rPr sz="1200" b="1">
+                <a:solidFill>
+                  <a:srgbClr val="E8ECF4"/>
+                </a:solidFill>
+                <a:latin typeface="Inter"/>
+              </a:rPr>
+              <a:t>CLI vs API surfaces: </a:t>
+            </a:r>
+            <a:r>
+              <a:rPr sz="1200">
                 <a:solidFill>
                   <a:srgbClr val="8A93A3"/>
                 </a:solidFill>
                 <a:latin typeface="Inter"/>
               </a:rPr>
-              <a:t>verbalized confidence; flash-as-judge</a:t>
+              <a:t>claude columns ride the subscription CLI (no sampler control, stated); the API/SDK rerun is specced, blocked only on a key.</a:t>
+            </a:r>
+          </a:p>
+          <a:p>
+            <a:pPr>
+              <a:spcAft>
+                <a:spcPts val="800"/>
+              </a:spcAft>
+            </a:pPr>
+            <a:r>
+              <a:rPr sz="1200" b="1">
+                <a:solidFill>
+                  <a:srgbClr val="E8ECF4"/>
+                </a:solidFill>
+                <a:latin typeface="Inter"/>
+              </a:rPr>
+              <a:t>Memory attached to models: </a:t>
+            </a:r>
+            <a:r>
+              <a:rPr sz="1200">
+                <a:solidFill>
+                  <a:srgbClr val="8A93A3"/>
+                </a:solidFill>
+                <a:latin typeface="Inter"/>
+              </a:rPr>
+              <a:t>every run is stateless by design; a remembering agent cannot be measured by repeats, and repeats are the method.</a:t>
+            </a:r>
+          </a:p>
+          <a:p>
+            <a:pPr>
+              <a:spcAft>
+                <a:spcPts val="800"/>
+              </a:spcAft>
+            </a:pPr>
+            <a:r>
+              <a:rPr sz="1200" b="1">
+                <a:solidFill>
+                  <a:srgbClr val="E8ECF4"/>
+                </a:solidFill>
+                <a:latin typeface="Inter"/>
+              </a:rPr>
+              <a:t>Fine-tuning: </a:t>
+            </a:r>
+            <a:r>
+              <a:rPr sz="1200">
+                <a:solidFill>
+                  <a:srgbClr val="8A93A3"/>
+                </a:solidFill>
+                <a:latin typeface="Inter"/>
+              </a:rPr>
+              <a:t>the prompt is the only movable part, on purpose.</a:t>
             </a:r>
           </a:p>
         </p:txBody>
@@ -7667,8 +7053,8 @@
         </p:nvSpPr>
         <p:spPr>
           <a:xfrm>
-            <a:off x="822960" y="5212080"/>
-            <a:ext cx="10515600" cy="914400"/>
+            <a:off x="6492240" y="1828800"/>
+            <a:ext cx="4846320" cy="4389120"/>
           </a:xfrm>
           <a:prstGeom prst="rect">
             <a:avLst/>
@@ -7683,17 +7069,97 @@
           <a:p>
             <a:pPr>
               <a:spcAft>
-                <a:spcPts val="600"/>
-              </a:spcAft>
-            </a:pPr>
-            <a:r>
-              <a:rPr sz="1300" b="0">
+                <a:spcPts val="1000"/>
+              </a:spcAft>
+            </a:pPr>
+            <a:r>
+              <a:rPr sz="1200" b="1">
+                <a:solidFill>
+                  <a:srgbClr val="CFA36C"/>
+                </a:solidFill>
+                <a:latin typeface="Inter"/>
+              </a:rPr>
+              <a:t>NEXT, GIVEN TIME, IN ORDER</a:t>
+            </a:r>
+          </a:p>
+          <a:p>
+            <a:pPr>
+              <a:spcAft>
+                <a:spcPts val="1000"/>
+              </a:spcAft>
+            </a:pPr>
+            <a:r>
+              <a:rPr sz="1300">
                 <a:solidFill>
                   <a:srgbClr val="8A93A3"/>
                 </a:solidFill>
                 <a:latin typeface="Inter"/>
               </a:rPr>
-              <a:t>Every number triggers an action or it is just reporting: gates green = ship; flip or contested split = hold and route to a human; tripwire = roll back. The $0 is a point estimate; n=12 cannot rule out ~$530k/1k worst-class. The gates carry the claim.</a:t>
+              <a:t>1.  More expert labels: the hard blocker; SPRT already says how many are needed.</a:t>
+            </a:r>
+          </a:p>
+          <a:p>
+            <a:pPr>
+              <a:spcAft>
+                <a:spcPts val="1000"/>
+              </a:spcAft>
+            </a:pPr>
+            <a:r>
+              <a:rPr sz="1300">
+                <a:solidFill>
+                  <a:srgbClr val="8A93A3"/>
+                </a:solidFill>
+                <a:latin typeface="Inter"/>
+              </a:rPr>
+              <a:t>2.  The v6 injection line through the full gate.</a:t>
+            </a:r>
+          </a:p>
+          <a:p>
+            <a:pPr>
+              <a:spcAft>
+                <a:spcPts val="1000"/>
+              </a:spcAft>
+            </a:pPr>
+            <a:r>
+              <a:rPr sz="1300">
+                <a:solidFill>
+                  <a:srgbClr val="8A93A3"/>
+                </a:solidFill>
+                <a:latin typeface="Inter"/>
+              </a:rPr>
+              <a:t>3.  API rerun of the claude columns with temperature control.</a:t>
+            </a:r>
+          </a:p>
+          <a:p>
+            <a:pPr>
+              <a:spcAft>
+                <a:spcPts val="1000"/>
+              </a:spcAft>
+            </a:pPr>
+            <a:r>
+              <a:rPr sz="1300">
+                <a:solidFill>
+                  <a:srgbClr val="8A93A3"/>
+                </a:solidFill>
+                <a:latin typeface="Inter"/>
+              </a:rPr>
+              <a:t>4.  The adjudication queue wired to a real reviewer; the playground already prototypes it.</a:t>
+            </a:r>
+          </a:p>
+          <a:p>
+            <a:pPr>
+              <a:spcAft>
+                <a:spcPts val="1000"/>
+              </a:spcAft>
+            </a:pPr>
+            <a:r>
+              <a:rPr sz="1300">
+                <a:solidFill>
+                  <a:srgbClr val="8A93A3"/>
+                </a:solidFill>
+                <a:latin typeface="Inter"/>
+              </a:rPr>
+              <a:t>5.  A tool-augmented variant as a new benchmark arm.</a:t>
             </a:r>
           </a:p>
         </p:txBody>
@@ -7758,393 +7224,6 @@
                 </a:solidFill>
                 <a:latin typeface="Inter"/>
               </a:rPr>
-              <a:t>THE BOUNDARY, DRAWN ON PURPOSE</a:t>
-            </a:r>
-          </a:p>
-        </p:txBody>
-      </p:sp>
-      <p:sp>
-        <p:nvSpPr>
-          <p:cNvPr id="3" name="TextBox 2"/>
-          <p:cNvSpPr txBox="1"/>
-          <p:nvPr/>
-        </p:nvSpPr>
-        <p:spPr>
-          <a:xfrm>
-            <a:off x="822960" y="914400"/>
-            <a:ext cx="10515600" cy="914400"/>
-          </a:xfrm>
-          <a:prstGeom prst="rect">
-            <a:avLst/>
-          </a:prstGeom>
-          <a:noFill/>
-        </p:spPr>
-        <p:txBody>
-          <a:bodyPr wrap="none">
-            <a:spAutoFit/>
-          </a:bodyPr>
-          <a:lstStyle/>
-          <a:p>
-            <a:pPr>
-              <a:spcAft>
-                <a:spcPts val="600"/>
-              </a:spcAft>
-            </a:pPr>
-            <a:r>
-              <a:rPr sz="3300" b="1">
-                <a:solidFill>
-                  <a:srgbClr val="E8ECF4"/>
-                </a:solidFill>
-                <a:latin typeface="Inter"/>
-              </a:rPr>
-              <a:t>Out of scope, and what I'd do next given time</a:t>
-            </a:r>
-          </a:p>
-        </p:txBody>
-      </p:sp>
-      <p:sp>
-        <p:nvSpPr>
-          <p:cNvPr id="4" name="TextBox 3"/>
-          <p:cNvSpPr txBox="1"/>
-          <p:nvPr/>
-        </p:nvSpPr>
-        <p:spPr>
-          <a:xfrm>
-            <a:off x="822960" y="1828800"/>
-            <a:ext cx="5303520" cy="4389120"/>
-          </a:xfrm>
-          <a:prstGeom prst="rect">
-            <a:avLst/>
-          </a:prstGeom>
-          <a:noFill/>
-        </p:spPr>
-        <p:txBody>
-          <a:bodyPr wrap="square">
-            <a:spAutoFit/>
-          </a:bodyPr>
-          <a:lstStyle/>
-          <a:p>
-            <a:pPr>
-              <a:spcAft>
-                <a:spcPts val="1000"/>
-              </a:spcAft>
-            </a:pPr>
-            <a:r>
-              <a:rPr sz="1200" b="1">
-                <a:solidFill>
-                  <a:srgbClr val="828FFF"/>
-                </a:solidFill>
-                <a:latin typeface="Inter"/>
-              </a:rPr>
-              <a:t>DELIBERATELY OUT OF SCOPE</a:t>
-            </a:r>
-          </a:p>
-          <a:p>
-            <a:pPr>
-              <a:spcAft>
-                <a:spcPts val="800"/>
-              </a:spcAft>
-            </a:pPr>
-            <a:r>
-              <a:rPr sz="1200" b="1">
-                <a:solidFill>
-                  <a:srgbClr val="E8ECF4"/>
-                </a:solidFill>
-                <a:latin typeface="Inter"/>
-              </a:rPr>
-              <a:t>Tools and skills: </a:t>
-            </a:r>
-            <a:r>
-              <a:rPr sz="1200">
-                <a:solidFill>
-                  <a:srgbClr val="8A93A3"/>
-                </a:solidFill>
-                <a:latin typeface="Inter"/>
-              </a:rPr>
-              <a:t>the agent decides from the dossier alone; no function calling, no retrieval. Tools change the eval surface, so they get their own arm, not a patch.</a:t>
-            </a:r>
-          </a:p>
-          <a:p>
-            <a:pPr>
-              <a:spcAft>
-                <a:spcPts val="800"/>
-              </a:spcAft>
-            </a:pPr>
-            <a:r>
-              <a:rPr sz="1200" b="1">
-                <a:solidFill>
-                  <a:srgbClr val="E8ECF4"/>
-                </a:solidFill>
-                <a:latin typeface="Inter"/>
-              </a:rPr>
-              <a:t>MCP integrations: </a:t>
-            </a:r>
-            <a:r>
-              <a:rPr sz="1200">
-                <a:solidFill>
-                  <a:srgbClr val="8A93A3"/>
-                </a:solidFill>
-                <a:latin typeface="Inter"/>
-              </a:rPr>
-              <a:t>no external context servers; every input is the frozen case file, which keeps runs reproducible.</a:t>
-            </a:r>
-          </a:p>
-          <a:p>
-            <a:pPr>
-              <a:spcAft>
-                <a:spcPts val="800"/>
-              </a:spcAft>
-            </a:pPr>
-            <a:r>
-              <a:rPr sz="1200" b="1">
-                <a:solidFill>
-                  <a:srgbClr val="E8ECF4"/>
-                </a:solidFill>
-                <a:latin typeface="Inter"/>
-              </a:rPr>
-              <a:t>CLI vs API surfaces: </a:t>
-            </a:r>
-            <a:r>
-              <a:rPr sz="1200">
-                <a:solidFill>
-                  <a:srgbClr val="8A93A3"/>
-                </a:solidFill>
-                <a:latin typeface="Inter"/>
-              </a:rPr>
-              <a:t>claude columns ride the subscription CLI (no sampler control, stated); the API/SDK rerun is specced, blocked only on a key.</a:t>
-            </a:r>
-          </a:p>
-          <a:p>
-            <a:pPr>
-              <a:spcAft>
-                <a:spcPts val="800"/>
-              </a:spcAft>
-            </a:pPr>
-            <a:r>
-              <a:rPr sz="1200" b="1">
-                <a:solidFill>
-                  <a:srgbClr val="E8ECF4"/>
-                </a:solidFill>
-                <a:latin typeface="Inter"/>
-              </a:rPr>
-              <a:t>Memory attached to models: </a:t>
-            </a:r>
-            <a:r>
-              <a:rPr sz="1200">
-                <a:solidFill>
-                  <a:srgbClr val="8A93A3"/>
-                </a:solidFill>
-                <a:latin typeface="Inter"/>
-              </a:rPr>
-              <a:t>every run is stateless by design; a remembering agent cannot be measured by repeats, and repeats are the method.</a:t>
-            </a:r>
-          </a:p>
-          <a:p>
-            <a:pPr>
-              <a:spcAft>
-                <a:spcPts val="800"/>
-              </a:spcAft>
-            </a:pPr>
-            <a:r>
-              <a:rPr sz="1200" b="1">
-                <a:solidFill>
-                  <a:srgbClr val="E8ECF4"/>
-                </a:solidFill>
-                <a:latin typeface="Inter"/>
-              </a:rPr>
-              <a:t>Fine-tuning: </a:t>
-            </a:r>
-            <a:r>
-              <a:rPr sz="1200">
-                <a:solidFill>
-                  <a:srgbClr val="8A93A3"/>
-                </a:solidFill>
-                <a:latin typeface="Inter"/>
-              </a:rPr>
-              <a:t>the prompt is the only movable part, on purpose.</a:t>
-            </a:r>
-          </a:p>
-        </p:txBody>
-      </p:sp>
-      <p:sp>
-        <p:nvSpPr>
-          <p:cNvPr id="5" name="TextBox 4"/>
-          <p:cNvSpPr txBox="1"/>
-          <p:nvPr/>
-        </p:nvSpPr>
-        <p:spPr>
-          <a:xfrm>
-            <a:off x="6492240" y="1828800"/>
-            <a:ext cx="4846320" cy="4389120"/>
-          </a:xfrm>
-          <a:prstGeom prst="rect">
-            <a:avLst/>
-          </a:prstGeom>
-          <a:noFill/>
-        </p:spPr>
-        <p:txBody>
-          <a:bodyPr wrap="square">
-            <a:spAutoFit/>
-          </a:bodyPr>
-          <a:lstStyle/>
-          <a:p>
-            <a:pPr>
-              <a:spcAft>
-                <a:spcPts val="1000"/>
-              </a:spcAft>
-            </a:pPr>
-            <a:r>
-              <a:rPr sz="1200" b="1">
-                <a:solidFill>
-                  <a:srgbClr val="CFA36C"/>
-                </a:solidFill>
-                <a:latin typeface="Inter"/>
-              </a:rPr>
-              <a:t>NEXT, GIVEN TIME, IN ORDER</a:t>
-            </a:r>
-          </a:p>
-          <a:p>
-            <a:pPr>
-              <a:spcAft>
-                <a:spcPts val="1000"/>
-              </a:spcAft>
-            </a:pPr>
-            <a:r>
-              <a:rPr sz="1300">
-                <a:solidFill>
-                  <a:srgbClr val="8A93A3"/>
-                </a:solidFill>
-                <a:latin typeface="Inter"/>
-              </a:rPr>
-              <a:t>1.  More expert labels: the hard blocker; SPRT already says how many are needed.</a:t>
-            </a:r>
-          </a:p>
-          <a:p>
-            <a:pPr>
-              <a:spcAft>
-                <a:spcPts val="1000"/>
-              </a:spcAft>
-            </a:pPr>
-            <a:r>
-              <a:rPr sz="1300">
-                <a:solidFill>
-                  <a:srgbClr val="8A93A3"/>
-                </a:solidFill>
-                <a:latin typeface="Inter"/>
-              </a:rPr>
-              <a:t>2.  The v6 injection line through the full gate.</a:t>
-            </a:r>
-          </a:p>
-          <a:p>
-            <a:pPr>
-              <a:spcAft>
-                <a:spcPts val="1000"/>
-              </a:spcAft>
-            </a:pPr>
-            <a:r>
-              <a:rPr sz="1300">
-                <a:solidFill>
-                  <a:srgbClr val="8A93A3"/>
-                </a:solidFill>
-                <a:latin typeface="Inter"/>
-              </a:rPr>
-              <a:t>3.  API rerun of the claude columns with temperature control.</a:t>
-            </a:r>
-          </a:p>
-          <a:p>
-            <a:pPr>
-              <a:spcAft>
-                <a:spcPts val="1000"/>
-              </a:spcAft>
-            </a:pPr>
-            <a:r>
-              <a:rPr sz="1300">
-                <a:solidFill>
-                  <a:srgbClr val="8A93A3"/>
-                </a:solidFill>
-                <a:latin typeface="Inter"/>
-              </a:rPr>
-              <a:t>4.  The adjudication queue wired to a real reviewer; the playground already prototypes it.</a:t>
-            </a:r>
-          </a:p>
-          <a:p>
-            <a:pPr>
-              <a:spcAft>
-                <a:spcPts val="1000"/>
-              </a:spcAft>
-            </a:pPr>
-            <a:r>
-              <a:rPr sz="1300">
-                <a:solidFill>
-                  <a:srgbClr val="8A93A3"/>
-                </a:solidFill>
-                <a:latin typeface="Inter"/>
-              </a:rPr>
-              <a:t>5.  A tool-augmented variant as a new benchmark arm.</a:t>
-            </a:r>
-          </a:p>
-        </p:txBody>
-      </p:sp>
-    </p:spTree>
-  </p:cSld>
-  <p:clrMapOvr>
-    <a:masterClrMapping/>
-  </p:clrMapOvr>
-</p:sld>
-</file>
-
-<file path=ppt/slides/slide23.xml><?xml version="1.0" encoding="utf-8"?>
-<p:sld xmlns:a="http://schemas.openxmlformats.org/drawingml/2006/main" xmlns:p="http://schemas.openxmlformats.org/presentationml/2006/main" xmlns:r="http://schemas.openxmlformats.org/officeDocument/2006/relationships">
-  <p:cSld>
-    <p:bg>
-      <p:bgPr>
-        <a:solidFill>
-          <a:srgbClr val="08090C"/>
-        </a:solidFill>
-        <a:effectLst/>
-      </p:bgPr>
-    </p:bg>
-    <p:spTree>
-      <p:nvGrpSpPr>
-        <p:cNvPr id="1" name=""/>
-        <p:cNvGrpSpPr/>
-        <p:nvPr/>
-      </p:nvGrpSpPr>
-      <p:grpSpPr/>
-      <p:sp>
-        <p:nvSpPr>
-          <p:cNvPr id="2" name="TextBox 1"/>
-          <p:cNvSpPr txBox="1"/>
-          <p:nvPr/>
-        </p:nvSpPr>
-        <p:spPr>
-          <a:xfrm>
-            <a:off x="822960" y="502920"/>
-            <a:ext cx="10515600" cy="365760"/>
-          </a:xfrm>
-          <a:prstGeom prst="rect">
-            <a:avLst/>
-          </a:prstGeom>
-          <a:noFill/>
-        </p:spPr>
-        <p:txBody>
-          <a:bodyPr wrap="none">
-            <a:spAutoFit/>
-          </a:bodyPr>
-          <a:lstStyle/>
-          <a:p>
-            <a:pPr>
-              <a:spcAft>
-                <a:spcPts val="600"/>
-              </a:spcAft>
-            </a:pPr>
-            <a:r>
-              <a:rPr sz="1200" b="1">
-                <a:solidFill>
-                  <a:srgbClr val="828FFF"/>
-                </a:solidFill>
-                <a:latin typeface="Inter"/>
-              </a:rPr>
               <a:t>IF THIS SHIPPED MONDAY</a:t>
             </a:r>
           </a:p>
@@ -9083,7 +8162,7 @@
                 </a:solidFill>
                 <a:latin typeface="Inter"/>
               </a:rPr>
-              <a:t>HOW THIS WAS ACTUALLY BUILT</a:t>
+              <a:t>MEASURED, BANKED, AND ON NO OTHER SLIDE</a:t>
             </a:r>
           </a:p>
         </p:txBody>
@@ -9122,7 +8201,7 @@
                 </a:solidFill>
                 <a:latin typeface="Inter"/>
               </a:rPr>
-              <a:t>Planned Sunday evening, re-planned at 00:15</a:t>
+              <a:t>The work the deck does not show</a:t>
             </a:r>
           </a:p>
         </p:txBody>
@@ -9135,8 +8214,8 @@
         </p:nvSpPr>
         <p:spPr>
           <a:xfrm>
-            <a:off x="822960" y="1920240"/>
-            <a:ext cx="10424160" cy="4023360"/>
+            <a:off x="822960" y="1828800"/>
+            <a:ext cx="10424160" cy="4389120"/>
           </a:xfrm>
           <a:prstGeom prst="rect">
             <a:avLst/>
@@ -9151,101 +8230,176 @@
           <a:p>
             <a:pPr>
               <a:spcAft>
-                <a:spcPts val="1200"/>
-              </a:spcAft>
-            </a:pPr>
-            <a:r>
-              <a:rPr sz="1400" b="1">
+                <a:spcPts val="900"/>
+              </a:spcAft>
+            </a:pPr>
+            <a:r>
+              <a:rPr sz="1300" b="1">
                 <a:solidFill>
                   <a:srgbClr val="E8ECF4"/>
                 </a:solidFill>
                 <a:latin typeface="Inter"/>
               </a:rPr>
-              <a:t>Sun 08-17, the plan: </a:t>
-            </a:r>
-            <a:r>
-              <a:rPr sz="1400">
+              <a:t>Classical baseline: </a:t>
+            </a:r>
+            <a:r>
+              <a:rPr sz="1300">
                 <a:solidFill>
                   <a:srgbClr val="8A93A3"/>
                 </a:solidFill>
                 <a:latin typeface="Inter"/>
               </a:rPr>
-              <a:t>vertical slices around a real calendar (fly Wednesday, remote from Bucharest, submit Sunday). By that night the engine, the v1-v4 ladder, and the matrix UI already stood, 115 runs banked.</a:t>
-            </a:r>
-          </a:p>
-          <a:p>
-            <a:pPr>
-              <a:spcAft>
-                <a:spcPts val="1200"/>
-              </a:spcAft>
-            </a:pPr>
-            <a:r>
-              <a:rPr sz="1400" b="1">
+              <a:t>hand-featured logistic regression, leave-one-out 8/12 vs the LLM's 11-12/12; all four LR misses are policy-reasoning cases in the expensive direction.</a:t>
+            </a:r>
+          </a:p>
+          <a:p>
+            <a:pPr>
+              <a:spcAft>
+                <a:spcPts val="900"/>
+              </a:spcAft>
+            </a:pPr>
+            <a:r>
+              <a:rPr sz="1300" b="1">
                 <a:solidFill>
                   <a:srgbClr val="E8ECF4"/>
                 </a:solidFill>
                 <a:latin typeface="Inter"/>
               </a:rPr>
-              <a:t>The cut list that refused to die: </a:t>
-            </a:r>
-            <a:r>
-              <a:rPr sz="1400">
+              <a:t>DSPy contrast arm: </a:t>
+            </a:r>
+            <a:r>
+              <a:rPr sz="1300">
                 <a:solidFill>
                   <a:srgbClr val="8A93A3"/>
                 </a:solidFill>
                 <a:latin typeface="Inter"/>
               </a:rPr>
-              <a:t>the plan cut the live demo, the gated prompt loop, and the synthetic factory. At 00:15 on submission day I rejected my own cut list; every open item ran between 00:15 and 03:00.</a:t>
-            </a:r>
-          </a:p>
-          <a:p>
-            <a:pPr>
-              <a:spcAft>
-                <a:spcPts val="1200"/>
-              </a:spcAft>
-            </a:pPr>
-            <a:r>
-              <a:rPr sz="1400" b="1">
+              <a:t>a compiled prompt hits the same 12/12 ceiling with a structurally different artifact; kept as a comparison, not a rung.</a:t>
+            </a:r>
+          </a:p>
+          <a:p>
+            <a:pPr>
+              <a:spcAft>
+                <a:spcPts val="900"/>
+              </a:spcAft>
+            </a:pPr>
+            <a:r>
+              <a:rPr sz="1300" b="1">
                 <a:solidFill>
                   <a:srgbClr val="E8ECF4"/>
                 </a:solidFill>
                 <a:latin typeface="Inter"/>
               </a:rPr>
-              <a:t>What that window produced: </a:t>
-            </a:r>
-            <a:r>
-              <a:rPr sz="1400">
+              <a:t>Self-consistency: </a:t>
+            </a:r>
+            <a:r>
+              <a:rPr sz="1300">
                 <a:solidFill>
                   <a:srgbClr val="8A93A3"/>
                 </a:solidFill>
                 <a:latin typeface="Inter"/>
               </a:rPr>
-              <a:t>qwen and nemotron columns, the injection and metamorphic suites (8/8 clause coverage), the cross-family judge, a classical-ML baseline, a DSPy contrast arm, and v5 itself through the gated loop: first 12/12 pass, accepted.</a:t>
-            </a:r>
-          </a:p>
-          <a:p>
-            <a:pPr>
-              <a:spcAft>
-                <a:spcPts val="1200"/>
-              </a:spcAft>
-            </a:pPr>
-            <a:r>
-              <a:rPr sz="1400" b="1">
+              <a:t>11 of 12 cases unanimous over N=5 temperature-raised repeats; vote fraction is the earned-confidence instrument.</a:t>
+            </a:r>
+          </a:p>
+          <a:p>
+            <a:pPr>
+              <a:spcAft>
+                <a:spcPts val="900"/>
+              </a:spcAft>
+            </a:pPr>
+            <a:r>
+              <a:rPr sz="1300" b="1">
                 <a:solidFill>
                   <a:srgbClr val="E8ECF4"/>
                 </a:solidFill>
                 <a:latin typeface="Inter"/>
               </a:rPr>
-              <a:t>glm-5.3, the honest gap: </a:t>
-            </a:r>
-            <a:r>
-              <a:rPr sz="1400">
+              <a:t>Sequential test: </a:t>
+            </a:r>
+            <a:r>
+              <a:rPr sz="1300">
                 <a:solidFill>
                   <a:srgbClr val="8A93A3"/>
                 </a:solidFill>
                 <a:latin typeface="Inter"/>
               </a:rPr>
-              <a:t>wired, then money-blocked on its only route (HTTP 429, insufficient balance, banked verbatim). It ships as recorded error rows, not as a column.</a:t>
+              <a:t>SPRT (p0=0.75, p1=0.92, alpha=0.05, beta=0.10) states how many more labeled cases certification needs.</a:t>
+            </a:r>
+          </a:p>
+          <a:p>
+            <a:pPr>
+              <a:spcAft>
+                <a:spcPts val="900"/>
+              </a:spcAft>
+            </a:pPr>
+            <a:r>
+              <a:rPr sz="1300" b="1">
+                <a:solidFill>
+                  <a:srgbClr val="E8ECF4"/>
+                </a:solidFill>
+                <a:latin typeface="Inter"/>
+              </a:rPr>
+              <a:t>Posterior odds: </a:t>
+            </a:r>
+            <a:r>
+              <a:rPr sz="1300">
+                <a:solidFill>
+                  <a:srgbClr val="8A93A3"/>
+                </a:solidFill>
+                <a:latin typeface="Inter"/>
+              </a:rPr>
+              <a:t>beta-binomial puts the ladder's edge over v1 at ~3:1, reported as odds, not certainty.</a:t>
+            </a:r>
+          </a:p>
+          <a:p>
+            <a:pPr>
+              <a:spcAft>
+                <a:spcPts val="900"/>
+              </a:spcAft>
+            </a:pPr>
+            <a:r>
+              <a:rPr sz="1300" b="1">
+                <a:solidFill>
+                  <a:srgbClr val="E8ECF4"/>
+                </a:solidFill>
+                <a:latin typeface="Inter"/>
+              </a:rPr>
+              <a:t>Provenance: </a:t>
+            </a:r>
+            <a:r>
+              <a:rPr sz="1300">
+                <a:solidFill>
+                  <a:srgbClr val="8A93A3"/>
+                </a:solidFill>
+                <a:latin typeface="Inter"/>
+              </a:rPr>
+              <a:t>PaySim and ULB licenses verified at source; IEEE-CIS marked honestly unverifiable; fetch scripts print the exact manual steps.</a:t>
+            </a:r>
+          </a:p>
+          <a:p>
+            <a:pPr>
+              <a:spcAft>
+                <a:spcPts val="900"/>
+              </a:spcAft>
+            </a:pPr>
+            <a:r>
+              <a:rPr sz="1300" b="1">
+                <a:solidFill>
+                  <a:srgbClr val="E8ECF4"/>
+                </a:solidFill>
+                <a:latin typeface="Inter"/>
+              </a:rPr>
+              <a:t>Surfaces: </a:t>
+            </a:r>
+            <a:r>
+              <a:rPr sz="1300">
+                <a:solidFill>
+                  <a:srgbClr val="8A93A3"/>
+                </a:solidFill>
+                <a:latin typeface="Inter"/>
+              </a:rPr>
+              <a:t>a Tauri desktop shell, the adjudication-queue playground, and a number-grounding audit: 81-98% of v5's cited numbers trace to the case file.</a:t>
             </a:r>
           </a:p>
         </p:txBody>
@@ -9310,7 +8464,7 @@
                 </a:solidFill>
                 <a:latin typeface="Inter"/>
               </a:rPr>
-              <a:t>MEASURED, BANKED, AND ON NO OTHER SLIDE</a:t>
+              <a:t>PPDAC · PLAN</a:t>
             </a:r>
           </a:p>
         </p:txBody>
@@ -9349,7 +8503,7 @@
                 </a:solidFill>
                 <a:latin typeface="Inter"/>
               </a:rPr>
-              <a:t>The work the deck does not show</a:t>
+              <a:t>Six commitments, fixed before any analysis</a:t>
             </a:r>
           </a:p>
         </p:txBody>
@@ -9362,8 +8516,8 @@
         </p:nvSpPr>
         <p:spPr>
           <a:xfrm>
-            <a:off x="822960" y="1828800"/>
-            <a:ext cx="10424160" cy="4389120"/>
+            <a:off x="822960" y="2011680"/>
+            <a:ext cx="10424160" cy="4206240"/>
           </a:xfrm>
           <a:prstGeom prst="rect">
             <a:avLst/>
@@ -9378,176 +8532,151 @@
           <a:p>
             <a:pPr>
               <a:spcAft>
-                <a:spcPts val="900"/>
-              </a:spcAft>
-            </a:pPr>
-            <a:r>
-              <a:rPr sz="1300" b="1">
+                <a:spcPts val="1200"/>
+              </a:spcAft>
+            </a:pPr>
+            <a:r>
+              <a:rPr sz="1600" b="1">
                 <a:solidFill>
                   <a:srgbClr val="E8ECF4"/>
                 </a:solidFill>
                 <a:latin typeface="Inter"/>
               </a:rPr>
-              <a:t>Classical baseline: </a:t>
-            </a:r>
-            <a:r>
-              <a:rPr sz="1300">
+              <a:t>1.  Suite separation. </a:t>
+            </a:r>
+            <a:r>
+              <a:rPr sz="1600">
                 <a:solidFill>
                   <a:srgbClr val="8A93A3"/>
                 </a:solidFill>
                 <a:latin typeface="Inter"/>
               </a:rPr>
-              <a:t>hand-featured logistic regression, leave-one-out 8/12 vs the LLM's 11-12/12; all four LR misses are policy-reasoning cases in the expensive direction.</a:t>
-            </a:r>
-          </a:p>
-          <a:p>
-            <a:pPr>
-              <a:spcAft>
-                <a:spcPts val="900"/>
-              </a:spcAft>
-            </a:pPr>
-            <a:r>
-              <a:rPr sz="1300" b="1">
+              <a:t>robustness kinds never blend into accuracy or loss.</a:t>
+            </a:r>
+          </a:p>
+          <a:p>
+            <a:pPr>
+              <a:spcAft>
+                <a:spcPts val="1200"/>
+              </a:spcAft>
+            </a:pPr>
+            <a:r>
+              <a:rPr sz="1600" b="1">
                 <a:solidFill>
                   <a:srgbClr val="E8ECF4"/>
                 </a:solidFill>
                 <a:latin typeface="Inter"/>
               </a:rPr>
-              <a:t>DSPy contrast arm: </a:t>
-            </a:r>
-            <a:r>
-              <a:rPr sz="1300">
+              <a:t>2.  One change per rung, </a:t>
+            </a:r>
+            <a:r>
+              <a:rPr sz="1600">
                 <a:solidFill>
                   <a:srgbClr val="8A93A3"/>
                 </a:solidFill>
                 <a:latin typeface="Inter"/>
               </a:rPr>
-              <a:t>a compiled prompt hits the same 12/12 ceiling with a structurally different artifact; kept as a comparison, not a rung.</a:t>
-            </a:r>
-          </a:p>
-          <a:p>
-            <a:pPr>
-              <a:spcAft>
-                <a:spcPts val="900"/>
-              </a:spcAft>
-            </a:pPr>
-            <a:r>
-              <a:rPr sz="1300" b="1">
+              <a:t>machine-diffed, every run pinned by content hash.</a:t>
+            </a:r>
+          </a:p>
+          <a:p>
+            <a:pPr>
+              <a:spcAft>
+                <a:spcPts val="1200"/>
+              </a:spcAft>
+            </a:pPr>
+            <a:r>
+              <a:rPr sz="1600" b="1">
                 <a:solidFill>
                   <a:srgbClr val="E8ECF4"/>
                 </a:solidFill>
                 <a:latin typeface="Inter"/>
               </a:rPr>
-              <a:t>Self-consistency: </a:t>
-            </a:r>
-            <a:r>
-              <a:rPr sz="1300">
+              <a:t>3.  Repeats before belief. </a:t>
+            </a:r>
+            <a:r>
+              <a:rPr sz="1600">
                 <a:solidFill>
                   <a:srgbClr val="8A93A3"/>
                 </a:solidFill>
                 <a:latin typeface="Inter"/>
               </a:rPr>
-              <a:t>11 of 12 cases unanimous over N=5 temperature-raised repeats; vote fraction is the earned-confidence instrument.</a:t>
-            </a:r>
-          </a:p>
-          <a:p>
-            <a:pPr>
-              <a:spcAft>
-                <a:spcPts val="900"/>
-              </a:spcAft>
-            </a:pPr>
-            <a:r>
-              <a:rPr sz="1300" b="1">
+              <a:t>N=5 before a single-run claim is trusted.</a:t>
+            </a:r>
+          </a:p>
+          <a:p>
+            <a:pPr>
+              <a:spcAft>
+                <a:spcPts val="1200"/>
+              </a:spcAft>
+            </a:pPr>
+            <a:r>
+              <a:rPr sz="1600" b="1">
                 <a:solidFill>
                   <a:srgbClr val="E8ECF4"/>
                 </a:solidFill>
                 <a:latin typeface="Inter"/>
               </a:rPr>
-              <a:t>Sequential test: </a:t>
-            </a:r>
-            <a:r>
-              <a:rPr sz="1300">
+              <a:t>4.  Trust gates over headlines: </a:t>
+            </a:r>
+            <a:r>
+              <a:rPr sz="1600">
                 <a:solidFill>
                   <a:srgbClr val="8A93A3"/>
                 </a:solidFill>
                 <a:latin typeface="Inter"/>
               </a:rPr>
-              <a:t>SPRT (p0=0.75, p1=0.92, alpha=0.05, beta=0.10) states how many more labeled cases certification needs.</a:t>
-            </a:r>
-          </a:p>
-          <a:p>
-            <a:pPr>
-              <a:spcAft>
-                <a:spcPts val="900"/>
-              </a:spcAft>
-            </a:pPr>
-            <a:r>
-              <a:rPr sz="1300" b="1">
+              <a:t>n, contract, CI width, flip, zero-tolerance tripwire.</a:t>
+            </a:r>
+          </a:p>
+          <a:p>
+            <a:pPr>
+              <a:spcAft>
+                <a:spcPts val="1200"/>
+              </a:spcAft>
+            </a:pPr>
+            <a:r>
+              <a:rPr sz="1600" b="1">
                 <a:solidFill>
                   <a:srgbClr val="E8ECF4"/>
                 </a:solidFill>
                 <a:latin typeface="Inter"/>
               </a:rPr>
-              <a:t>Posterior odds: </a:t>
-            </a:r>
-            <a:r>
-              <a:rPr sz="1300">
+              <a:t>5.  Dollar OEC: </a:t>
+            </a:r>
+            <a:r>
+              <a:rPr sz="1600">
                 <a:solidFill>
                   <a:srgbClr val="8A93A3"/>
                 </a:solidFill>
                 <a:latin typeface="Inter"/>
               </a:rPr>
-              <a:t>beta-binomial puts the ladder's edge over v1 at ~3:1, reported as odds, not certainty.</a:t>
-            </a:r>
-          </a:p>
-          <a:p>
-            <a:pPr>
-              <a:spcAft>
-                <a:spcPts val="900"/>
-              </a:spcAft>
-            </a:pPr>
-            <a:r>
-              <a:rPr sz="1300" b="1">
+              <a:t>three stated costs + one derived, swept, bootstrapped, reweighted.</a:t>
+            </a:r>
+          </a:p>
+          <a:p>
+            <a:pPr>
+              <a:spcAft>
+                <a:spcPts val="1200"/>
+              </a:spcAft>
+            </a:pPr>
+            <a:r>
+              <a:rPr sz="1600" b="1">
                 <a:solidFill>
                   <a:srgbClr val="E8ECF4"/>
                 </a:solidFill>
                 <a:latin typeface="Inter"/>
               </a:rPr>
-              <a:t>Provenance: </a:t>
-            </a:r>
-            <a:r>
-              <a:rPr sz="1300">
+              <a:t>6.  Label tiers visible: </a:t>
+            </a:r>
+            <a:r>
+              <a:rPr sz="1600">
                 <a:solidFill>
                   <a:srgbClr val="8A93A3"/>
                 </a:solidFill>
                 <a:latin typeface="Inter"/>
               </a:rPr>
-              <a:t>PaySim and ULB licenses verified at source; IEEE-CIS marked honestly unverifiable; fetch scripts print the exact manual steps.</a:t>
-            </a:r>
-          </a:p>
-          <a:p>
-            <a:pPr>
-              <a:spcAft>
-                <a:spcPts val="900"/>
-              </a:spcAft>
-            </a:pPr>
-            <a:r>
-              <a:rPr sz="1300" b="1">
-                <a:solidFill>
-                  <a:srgbClr val="E8ECF4"/>
-                </a:solidFill>
-                <a:latin typeface="Inter"/>
-              </a:rPr>
-              <a:t>Surfaces: </a:t>
-            </a:r>
-            <a:r>
-              <a:rPr sz="1300">
-                <a:solidFill>
-                  <a:srgbClr val="8A93A3"/>
-                </a:solidFill>
-                <a:latin typeface="Inter"/>
-              </a:rPr>
-              <a:t>a Tauri desktop shell, the adjudication-queue playground, and a number-grounding audit: 81-98% of v5's cited numbers trace to the case file.</a:t>
+              <a:t>4 expert / 5 adjudicated / constructed, never averaged.</a:t>
             </a:r>
           </a:p>
         </p:txBody>
@@ -9561,283 +8690,6 @@
 </file>
 
 <file path=ppt/slides/slide8.xml><?xml version="1.0" encoding="utf-8"?>
-<p:sld xmlns:a="http://schemas.openxmlformats.org/drawingml/2006/main" xmlns:p="http://schemas.openxmlformats.org/presentationml/2006/main" xmlns:r="http://schemas.openxmlformats.org/officeDocument/2006/relationships">
-  <p:cSld>
-    <p:bg>
-      <p:bgPr>
-        <a:solidFill>
-          <a:srgbClr val="08090C"/>
-        </a:solidFill>
-        <a:effectLst/>
-      </p:bgPr>
-    </p:bg>
-    <p:spTree>
-      <p:nvGrpSpPr>
-        <p:cNvPr id="1" name=""/>
-        <p:cNvGrpSpPr/>
-        <p:nvPr/>
-      </p:nvGrpSpPr>
-      <p:grpSpPr/>
-      <p:sp>
-        <p:nvSpPr>
-          <p:cNvPr id="2" name="TextBox 1"/>
-          <p:cNvSpPr txBox="1"/>
-          <p:nvPr/>
-        </p:nvSpPr>
-        <p:spPr>
-          <a:xfrm>
-            <a:off x="822960" y="502920"/>
-            <a:ext cx="10515600" cy="365760"/>
-          </a:xfrm>
-          <a:prstGeom prst="rect">
-            <a:avLst/>
-          </a:prstGeom>
-          <a:noFill/>
-        </p:spPr>
-        <p:txBody>
-          <a:bodyPr wrap="none">
-            <a:spAutoFit/>
-          </a:bodyPr>
-          <a:lstStyle/>
-          <a:p>
-            <a:pPr>
-              <a:spcAft>
-                <a:spcPts val="600"/>
-              </a:spcAft>
-            </a:pPr>
-            <a:r>
-              <a:rPr sz="1200" b="1">
-                <a:solidFill>
-                  <a:srgbClr val="828FFF"/>
-                </a:solidFill>
-                <a:latin typeface="Inter"/>
-              </a:rPr>
-              <a:t>PPDAC · PLAN</a:t>
-            </a:r>
-          </a:p>
-        </p:txBody>
-      </p:sp>
-      <p:sp>
-        <p:nvSpPr>
-          <p:cNvPr id="3" name="TextBox 2"/>
-          <p:cNvSpPr txBox="1"/>
-          <p:nvPr/>
-        </p:nvSpPr>
-        <p:spPr>
-          <a:xfrm>
-            <a:off x="822960" y="914400"/>
-            <a:ext cx="10515600" cy="914400"/>
-          </a:xfrm>
-          <a:prstGeom prst="rect">
-            <a:avLst/>
-          </a:prstGeom>
-          <a:noFill/>
-        </p:spPr>
-        <p:txBody>
-          <a:bodyPr wrap="none">
-            <a:spAutoFit/>
-          </a:bodyPr>
-          <a:lstStyle/>
-          <a:p>
-            <a:pPr>
-              <a:spcAft>
-                <a:spcPts val="600"/>
-              </a:spcAft>
-            </a:pPr>
-            <a:r>
-              <a:rPr sz="3300" b="1">
-                <a:solidFill>
-                  <a:srgbClr val="E8ECF4"/>
-                </a:solidFill>
-                <a:latin typeface="Inter"/>
-              </a:rPr>
-              <a:t>Six commitments, fixed before any analysis</a:t>
-            </a:r>
-          </a:p>
-        </p:txBody>
-      </p:sp>
-      <p:sp>
-        <p:nvSpPr>
-          <p:cNvPr id="4" name="TextBox 3"/>
-          <p:cNvSpPr txBox="1"/>
-          <p:nvPr/>
-        </p:nvSpPr>
-        <p:spPr>
-          <a:xfrm>
-            <a:off x="822960" y="2011680"/>
-            <a:ext cx="10424160" cy="4206240"/>
-          </a:xfrm>
-          <a:prstGeom prst="rect">
-            <a:avLst/>
-          </a:prstGeom>
-          <a:noFill/>
-        </p:spPr>
-        <p:txBody>
-          <a:bodyPr wrap="square">
-            <a:spAutoFit/>
-          </a:bodyPr>
-          <a:lstStyle/>
-          <a:p>
-            <a:pPr>
-              <a:spcAft>
-                <a:spcPts val="1200"/>
-              </a:spcAft>
-            </a:pPr>
-            <a:r>
-              <a:rPr sz="1600" b="1">
-                <a:solidFill>
-                  <a:srgbClr val="E8ECF4"/>
-                </a:solidFill>
-                <a:latin typeface="Inter"/>
-              </a:rPr>
-              <a:t>1.  Suite separation. </a:t>
-            </a:r>
-            <a:r>
-              <a:rPr sz="1600">
-                <a:solidFill>
-                  <a:srgbClr val="8A93A3"/>
-                </a:solidFill>
-                <a:latin typeface="Inter"/>
-              </a:rPr>
-              <a:t>robustness kinds never blend into accuracy or loss.</a:t>
-            </a:r>
-          </a:p>
-          <a:p>
-            <a:pPr>
-              <a:spcAft>
-                <a:spcPts val="1200"/>
-              </a:spcAft>
-            </a:pPr>
-            <a:r>
-              <a:rPr sz="1600" b="1">
-                <a:solidFill>
-                  <a:srgbClr val="E8ECF4"/>
-                </a:solidFill>
-                <a:latin typeface="Inter"/>
-              </a:rPr>
-              <a:t>2.  One change per rung, </a:t>
-            </a:r>
-            <a:r>
-              <a:rPr sz="1600">
-                <a:solidFill>
-                  <a:srgbClr val="8A93A3"/>
-                </a:solidFill>
-                <a:latin typeface="Inter"/>
-              </a:rPr>
-              <a:t>machine-diffed, every run pinned by content hash.</a:t>
-            </a:r>
-          </a:p>
-          <a:p>
-            <a:pPr>
-              <a:spcAft>
-                <a:spcPts val="1200"/>
-              </a:spcAft>
-            </a:pPr>
-            <a:r>
-              <a:rPr sz="1600" b="1">
-                <a:solidFill>
-                  <a:srgbClr val="E8ECF4"/>
-                </a:solidFill>
-                <a:latin typeface="Inter"/>
-              </a:rPr>
-              <a:t>3.  Repeats before belief. </a:t>
-            </a:r>
-            <a:r>
-              <a:rPr sz="1600">
-                <a:solidFill>
-                  <a:srgbClr val="8A93A3"/>
-                </a:solidFill>
-                <a:latin typeface="Inter"/>
-              </a:rPr>
-              <a:t>N=5 before a single-run claim is trusted.</a:t>
-            </a:r>
-          </a:p>
-          <a:p>
-            <a:pPr>
-              <a:spcAft>
-                <a:spcPts val="1200"/>
-              </a:spcAft>
-            </a:pPr>
-            <a:r>
-              <a:rPr sz="1600" b="1">
-                <a:solidFill>
-                  <a:srgbClr val="E8ECF4"/>
-                </a:solidFill>
-                <a:latin typeface="Inter"/>
-              </a:rPr>
-              <a:t>4.  Trust gates over headlines: </a:t>
-            </a:r>
-            <a:r>
-              <a:rPr sz="1600">
-                <a:solidFill>
-                  <a:srgbClr val="8A93A3"/>
-                </a:solidFill>
-                <a:latin typeface="Inter"/>
-              </a:rPr>
-              <a:t>n, contract, CI width, flip, zero-tolerance tripwire.</a:t>
-            </a:r>
-          </a:p>
-          <a:p>
-            <a:pPr>
-              <a:spcAft>
-                <a:spcPts val="1200"/>
-              </a:spcAft>
-            </a:pPr>
-            <a:r>
-              <a:rPr sz="1600" b="1">
-                <a:solidFill>
-                  <a:srgbClr val="E8ECF4"/>
-                </a:solidFill>
-                <a:latin typeface="Inter"/>
-              </a:rPr>
-              <a:t>5.  Dollar OEC: </a:t>
-            </a:r>
-            <a:r>
-              <a:rPr sz="1600">
-                <a:solidFill>
-                  <a:srgbClr val="8A93A3"/>
-                </a:solidFill>
-                <a:latin typeface="Inter"/>
-              </a:rPr>
-              <a:t>three stated costs + one derived, swept, bootstrapped, reweighted.</a:t>
-            </a:r>
-          </a:p>
-          <a:p>
-            <a:pPr>
-              <a:spcAft>
-                <a:spcPts val="1200"/>
-              </a:spcAft>
-            </a:pPr>
-            <a:r>
-              <a:rPr sz="1600" b="1">
-                <a:solidFill>
-                  <a:srgbClr val="E8ECF4"/>
-                </a:solidFill>
-                <a:latin typeface="Inter"/>
-              </a:rPr>
-              <a:t>6.  Label tiers visible: </a:t>
-            </a:r>
-            <a:r>
-              <a:rPr sz="1600">
-                <a:solidFill>
-                  <a:srgbClr val="8A93A3"/>
-                </a:solidFill>
-                <a:latin typeface="Inter"/>
-              </a:rPr>
-              <a:t>4 expert / 5 adjudicated / constructed, never averaged.</a:t>
-            </a:r>
-          </a:p>
-        </p:txBody>
-      </p:sp>
-    </p:spTree>
-  </p:cSld>
-  <p:clrMapOvr>
-    <a:masterClrMapping/>
-  </p:clrMapOvr>
-</p:sld>
-</file>
-
-<file path=ppt/slides/slide9.xml><?xml version="1.0" encoding="utf-8"?>
 <p:sld xmlns:a="http://schemas.openxmlformats.org/drawingml/2006/main" xmlns:p="http://schemas.openxmlformats.org/presentationml/2006/main" xmlns:r="http://schemas.openxmlformats.org/officeDocument/2006/relationships">
   <p:cSld>
     <p:bg>
@@ -10568,6 +9420,926 @@
 </p:sld>
 </file>
 
+<file path=ppt/slides/slide9.xml><?xml version="1.0" encoding="utf-8"?>
+<p:sld xmlns:a="http://schemas.openxmlformats.org/drawingml/2006/main" xmlns:p="http://schemas.openxmlformats.org/presentationml/2006/main" xmlns:r="http://schemas.openxmlformats.org/officeDocument/2006/relationships">
+  <p:cSld>
+    <p:bg>
+      <p:bgPr>
+        <a:solidFill>
+          <a:srgbClr val="08090C"/>
+        </a:solidFill>
+        <a:effectLst/>
+      </p:bgPr>
+    </p:bg>
+    <p:spTree>
+      <p:nvGrpSpPr>
+        <p:cNvPr id="1" name=""/>
+        <p:cNvGrpSpPr/>
+        <p:nvPr/>
+      </p:nvGrpSpPr>
+      <p:grpSpPr/>
+      <p:sp>
+        <p:nvSpPr>
+          <p:cNvPr id="2" name="TextBox 1"/>
+          <p:cNvSpPr txBox="1"/>
+          <p:nvPr/>
+        </p:nvSpPr>
+        <p:spPr>
+          <a:xfrm>
+            <a:off x="822960" y="502920"/>
+            <a:ext cx="10515600" cy="365760"/>
+          </a:xfrm>
+          <a:prstGeom prst="rect">
+            <a:avLst/>
+          </a:prstGeom>
+          <a:noFill/>
+        </p:spPr>
+        <p:txBody>
+          <a:bodyPr wrap="none">
+            <a:spAutoFit/>
+          </a:bodyPr>
+          <a:lstStyle/>
+          <a:p>
+            <a:pPr>
+              <a:spcAft>
+                <a:spcPts val="600"/>
+              </a:spcAft>
+            </a:pPr>
+            <a:r>
+              <a:rPr sz="1200" b="1">
+                <a:solidFill>
+                  <a:srgbClr val="828FFF"/>
+                </a:solidFill>
+                <a:latin typeface="Inter"/>
+              </a:rPr>
+              <a:t>PPDAC · PLAN · THE MACHINE</a:t>
+            </a:r>
+          </a:p>
+        </p:txBody>
+      </p:sp>
+      <p:sp>
+        <p:nvSpPr>
+          <p:cNvPr id="3" name="TextBox 2"/>
+          <p:cNvSpPr txBox="1"/>
+          <p:nvPr/>
+        </p:nvSpPr>
+        <p:spPr>
+          <a:xfrm>
+            <a:off x="822960" y="914400"/>
+            <a:ext cx="10515600" cy="914400"/>
+          </a:xfrm>
+          <a:prstGeom prst="rect">
+            <a:avLst/>
+          </a:prstGeom>
+          <a:noFill/>
+        </p:spPr>
+        <p:txBody>
+          <a:bodyPr wrap="none">
+            <a:spAutoFit/>
+          </a:bodyPr>
+          <a:lstStyle/>
+          <a:p>
+            <a:pPr>
+              <a:spcAft>
+                <a:spcPts val="600"/>
+              </a:spcAft>
+            </a:pPr>
+            <a:r>
+              <a:rPr sz="3300" b="1">
+                <a:solidFill>
+                  <a:srgbClr val="E8ECF4"/>
+                </a:solidFill>
+                <a:latin typeface="Inter"/>
+              </a:rPr>
+              <a:t>One pipeline, every claim traceable to a run</a:t>
+            </a:r>
+          </a:p>
+        </p:txBody>
+      </p:sp>
+      <p:sp>
+        <p:nvSpPr>
+          <p:cNvPr id="4" name="Rounded Rectangle 3"/>
+          <p:cNvSpPr/>
+          <p:nvPr/>
+        </p:nvSpPr>
+        <p:spPr>
+          <a:xfrm>
+            <a:off x="822960" y="2103120"/>
+            <a:ext cx="2103120" cy="914400"/>
+          </a:xfrm>
+          <a:prstGeom prst="roundRect">
+            <a:avLst/>
+          </a:prstGeom>
+          <a:solidFill>
+            <a:srgbClr val="111420"/>
+          </a:solidFill>
+          <a:ln w="15240">
+            <a:solidFill>
+              <a:srgbClr val="3A3F4E"/>
+            </a:solidFill>
+          </a:ln>
+          <a:effectLst/>
+        </p:spPr>
+        <p:style>
+          <a:lnRef idx="1">
+            <a:schemeClr val="accent1"/>
+          </a:lnRef>
+          <a:fillRef idx="3">
+            <a:schemeClr val="accent1"/>
+          </a:fillRef>
+          <a:effectRef idx="2">
+            <a:schemeClr val="accent1"/>
+          </a:effectRef>
+          <a:fontRef idx="minor">
+            <a:schemeClr val="lt1"/>
+          </a:fontRef>
+        </p:style>
+        <p:txBody>
+          <a:bodyPr rtlCol="0" anchor="ctr" wrap="square"/>
+          <a:lstStyle/>
+          <a:p>
+            <a:pPr algn="ctr">
+              <a:spcAft>
+                <a:spcPts val="200"/>
+              </a:spcAft>
+            </a:pPr>
+            <a:r>
+              <a:rPr sz="1300" b="1">
+                <a:solidFill>
+                  <a:srgbClr val="E8ECF4"/>
+                </a:solidFill>
+                <a:latin typeface="Inter"/>
+              </a:rPr>
+              <a:t>89 labeled cases</a:t>
+            </a:r>
+          </a:p>
+          <a:p>
+            <a:pPr>
+              <a:spcAft>
+                <a:spcPts val="0"/>
+              </a:spcAft>
+            </a:pPr>
+            <a:r>
+              <a:rPr sz="1000" b="0">
+                <a:solidFill>
+                  <a:srgbClr val="8A93A3"/>
+                </a:solidFill>
+                <a:latin typeface="Inter"/>
+              </a:rPr>
+              <a:t>+ POLICY.md, frozen</a:t>
+            </a:r>
+          </a:p>
+        </p:txBody>
+      </p:sp>
+      <p:sp>
+        <p:nvSpPr>
+          <p:cNvPr id="5" name="Rounded Rectangle 4"/>
+          <p:cNvSpPr/>
+          <p:nvPr/>
+        </p:nvSpPr>
+        <p:spPr>
+          <a:xfrm>
+            <a:off x="822960" y="3474720"/>
+            <a:ext cx="2103120" cy="914400"/>
+          </a:xfrm>
+          <a:prstGeom prst="roundRect">
+            <a:avLst/>
+          </a:prstGeom>
+          <a:solidFill>
+            <a:srgbClr val="111420"/>
+          </a:solidFill>
+          <a:ln w="15240">
+            <a:solidFill>
+              <a:srgbClr val="3A3F4E"/>
+            </a:solidFill>
+          </a:ln>
+          <a:effectLst/>
+        </p:spPr>
+        <p:style>
+          <a:lnRef idx="1">
+            <a:schemeClr val="accent1"/>
+          </a:lnRef>
+          <a:fillRef idx="3">
+            <a:schemeClr val="accent1"/>
+          </a:fillRef>
+          <a:effectRef idx="2">
+            <a:schemeClr val="accent1"/>
+          </a:effectRef>
+          <a:fontRef idx="minor">
+            <a:schemeClr val="lt1"/>
+          </a:fontRef>
+        </p:style>
+        <p:txBody>
+          <a:bodyPr rtlCol="0" anchor="ctr" wrap="square"/>
+          <a:lstStyle/>
+          <a:p>
+            <a:pPr algn="ctr">
+              <a:spcAft>
+                <a:spcPts val="200"/>
+              </a:spcAft>
+            </a:pPr>
+            <a:r>
+              <a:rPr sz="1300" b="1">
+                <a:solidFill>
+                  <a:srgbClr val="E8ECF4"/>
+                </a:solidFill>
+                <a:latin typeface="Inter"/>
+              </a:rPr>
+              <a:t>prompt ladder</a:t>
+            </a:r>
+          </a:p>
+          <a:p>
+            <a:pPr>
+              <a:spcAft>
+                <a:spcPts val="0"/>
+              </a:spcAft>
+            </a:pPr>
+            <a:r>
+              <a:rPr sz="1000" b="0">
+                <a:solidFill>
+                  <a:srgbClr val="8A93A3"/>
+                </a:solidFill>
+                <a:latin typeface="Inter"/>
+              </a:rPr>
+              <a:t>v1..v5, one change per rung</a:t>
+            </a:r>
+          </a:p>
+        </p:txBody>
+      </p:sp>
+      <p:sp>
+        <p:nvSpPr>
+          <p:cNvPr id="6" name="Rounded Rectangle 5"/>
+          <p:cNvSpPr/>
+          <p:nvPr/>
+        </p:nvSpPr>
+        <p:spPr>
+          <a:xfrm>
+            <a:off x="3474720" y="2788920"/>
+            <a:ext cx="2103120" cy="914400"/>
+          </a:xfrm>
+          <a:prstGeom prst="roundRect">
+            <a:avLst/>
+          </a:prstGeom>
+          <a:solidFill>
+            <a:srgbClr val="111420"/>
+          </a:solidFill>
+          <a:ln w="15240">
+            <a:solidFill>
+              <a:srgbClr val="828FFF"/>
+            </a:solidFill>
+          </a:ln>
+          <a:effectLst/>
+        </p:spPr>
+        <p:style>
+          <a:lnRef idx="1">
+            <a:schemeClr val="accent1"/>
+          </a:lnRef>
+          <a:fillRef idx="3">
+            <a:schemeClr val="accent1"/>
+          </a:fillRef>
+          <a:effectRef idx="2">
+            <a:schemeClr val="accent1"/>
+          </a:effectRef>
+          <a:fontRef idx="minor">
+            <a:schemeClr val="lt1"/>
+          </a:fontRef>
+        </p:style>
+        <p:txBody>
+          <a:bodyPr rtlCol="0" anchor="ctr" wrap="square"/>
+          <a:lstStyle/>
+          <a:p>
+            <a:pPr algn="ctr">
+              <a:spcAft>
+                <a:spcPts val="200"/>
+              </a:spcAft>
+            </a:pPr>
+            <a:r>
+              <a:rPr sz="1300" b="1">
+                <a:solidFill>
+                  <a:srgbClr val="E8ECF4"/>
+                </a:solidFill>
+                <a:latin typeface="Inter"/>
+              </a:rPr>
+              <a:t>runner</a:t>
+            </a:r>
+          </a:p>
+          <a:p>
+            <a:pPr>
+              <a:spcAft>
+                <a:spcPts val="0"/>
+              </a:spcAft>
+            </a:pPr>
+            <a:r>
+              <a:rPr sz="1000" b="0">
+                <a:solidFill>
+                  <a:srgbClr val="8A93A3"/>
+                </a:solidFill>
+                <a:latin typeface="Inter"/>
+              </a:rPr>
+              <a:t>7 providers, N=5 repeats</a:t>
+            </a:r>
+          </a:p>
+        </p:txBody>
+      </p:sp>
+      <p:sp>
+        <p:nvSpPr>
+          <p:cNvPr id="7" name="Rounded Rectangle 6"/>
+          <p:cNvSpPr/>
+          <p:nvPr/>
+        </p:nvSpPr>
+        <p:spPr>
+          <a:xfrm>
+            <a:off x="6126480" y="2788920"/>
+            <a:ext cx="2103120" cy="914400"/>
+          </a:xfrm>
+          <a:prstGeom prst="roundRect">
+            <a:avLst/>
+          </a:prstGeom>
+          <a:solidFill>
+            <a:srgbClr val="111420"/>
+          </a:solidFill>
+          <a:ln w="15240">
+            <a:solidFill>
+              <a:srgbClr val="CFA36C"/>
+            </a:solidFill>
+          </a:ln>
+          <a:effectLst/>
+        </p:spPr>
+        <p:style>
+          <a:lnRef idx="1">
+            <a:schemeClr val="accent1"/>
+          </a:lnRef>
+          <a:fillRef idx="3">
+            <a:schemeClr val="accent1"/>
+          </a:fillRef>
+          <a:effectRef idx="2">
+            <a:schemeClr val="accent1"/>
+          </a:effectRef>
+          <a:fontRef idx="minor">
+            <a:schemeClr val="lt1"/>
+          </a:fontRef>
+        </p:style>
+        <p:txBody>
+          <a:bodyPr rtlCol="0" anchor="ctr" wrap="square"/>
+          <a:lstStyle/>
+          <a:p>
+            <a:pPr algn="ctr">
+              <a:spcAft>
+                <a:spcPts val="200"/>
+              </a:spcAft>
+            </a:pPr>
+            <a:r>
+              <a:rPr sz="1300" b="1">
+                <a:solidFill>
+                  <a:srgbClr val="E8ECF4"/>
+                </a:solidFill>
+                <a:latin typeface="Inter"/>
+              </a:rPr>
+              <a:t>sqlite ledger</a:t>
+            </a:r>
+          </a:p>
+          <a:p>
+            <a:pPr>
+              <a:spcAft>
+                <a:spcPts val="0"/>
+              </a:spcAft>
+            </a:pPr>
+            <a:r>
+              <a:rPr sz="1000" b="0">
+                <a:solidFill>
+                  <a:srgbClr val="8A93A3"/>
+                </a:solidFill>
+                <a:latin typeface="Inter"/>
+              </a:rPr>
+              <a:t>every run, hash-pinned</a:t>
+            </a:r>
+          </a:p>
+        </p:txBody>
+      </p:sp>
+      <p:sp>
+        <p:nvSpPr>
+          <p:cNvPr id="8" name="Rounded Rectangle 7"/>
+          <p:cNvSpPr/>
+          <p:nvPr/>
+        </p:nvSpPr>
+        <p:spPr>
+          <a:xfrm>
+            <a:off x="3474720" y="4297680"/>
+            <a:ext cx="2103120" cy="914400"/>
+          </a:xfrm>
+          <a:prstGeom prst="roundRect">
+            <a:avLst/>
+          </a:prstGeom>
+          <a:solidFill>
+            <a:srgbClr val="111420"/>
+          </a:solidFill>
+          <a:ln w="15240">
+            <a:solidFill>
+              <a:srgbClr val="4ADE80"/>
+            </a:solidFill>
+          </a:ln>
+          <a:effectLst/>
+        </p:spPr>
+        <p:style>
+          <a:lnRef idx="1">
+            <a:schemeClr val="accent1"/>
+          </a:lnRef>
+          <a:fillRef idx="3">
+            <a:schemeClr val="accent1"/>
+          </a:fillRef>
+          <a:effectRef idx="2">
+            <a:schemeClr val="accent1"/>
+          </a:effectRef>
+          <a:fontRef idx="minor">
+            <a:schemeClr val="lt1"/>
+          </a:fontRef>
+        </p:style>
+        <p:txBody>
+          <a:bodyPr rtlCol="0" anchor="ctr" wrap="square"/>
+          <a:lstStyle/>
+          <a:p>
+            <a:pPr algn="ctr">
+              <a:spcAft>
+                <a:spcPts val="200"/>
+              </a:spcAft>
+            </a:pPr>
+            <a:r>
+              <a:rPr sz="1300" b="1">
+                <a:solidFill>
+                  <a:srgbClr val="E8ECF4"/>
+                </a:solidFill>
+                <a:latin typeface="Inter"/>
+              </a:rPr>
+              <a:t>trust gates</a:t>
+            </a:r>
+          </a:p>
+          <a:p>
+            <a:pPr>
+              <a:spcAft>
+                <a:spcPts val="0"/>
+              </a:spcAft>
+            </a:pPr>
+            <a:r>
+              <a:rPr sz="1000" b="0">
+                <a:solidFill>
+                  <a:srgbClr val="8A93A3"/>
+                </a:solidFill>
+                <a:latin typeface="Inter"/>
+              </a:rPr>
+              <a:t>n, contract, CI, flip, tripwire</a:t>
+            </a:r>
+          </a:p>
+        </p:txBody>
+      </p:sp>
+      <p:sp>
+        <p:nvSpPr>
+          <p:cNvPr id="9" name="Rounded Rectangle 8"/>
+          <p:cNvSpPr/>
+          <p:nvPr/>
+        </p:nvSpPr>
+        <p:spPr>
+          <a:xfrm>
+            <a:off x="6126480" y="4297680"/>
+            <a:ext cx="2103120" cy="914400"/>
+          </a:xfrm>
+          <a:prstGeom prst="roundRect">
+            <a:avLst/>
+          </a:prstGeom>
+          <a:solidFill>
+            <a:srgbClr val="111420"/>
+          </a:solidFill>
+          <a:ln w="15240">
+            <a:solidFill>
+              <a:srgbClr val="3A3F4E"/>
+            </a:solidFill>
+          </a:ln>
+          <a:effectLst/>
+        </p:spPr>
+        <p:style>
+          <a:lnRef idx="1">
+            <a:schemeClr val="accent1"/>
+          </a:lnRef>
+          <a:fillRef idx="3">
+            <a:schemeClr val="accent1"/>
+          </a:fillRef>
+          <a:effectRef idx="2">
+            <a:schemeClr val="accent1"/>
+          </a:effectRef>
+          <a:fontRef idx="minor">
+            <a:schemeClr val="lt1"/>
+          </a:fontRef>
+        </p:style>
+        <p:txBody>
+          <a:bodyPr rtlCol="0" anchor="ctr" wrap="square"/>
+          <a:lstStyle/>
+          <a:p>
+            <a:pPr algn="ctr">
+              <a:spcAft>
+                <a:spcPts val="200"/>
+              </a:spcAft>
+            </a:pPr>
+            <a:r>
+              <a:rPr sz="1300" b="1">
+                <a:solidFill>
+                  <a:srgbClr val="E8ECF4"/>
+                </a:solidFill>
+                <a:latin typeface="Inter"/>
+              </a:rPr>
+              <a:t>export</a:t>
+            </a:r>
+          </a:p>
+          <a:p>
+            <a:pPr>
+              <a:spcAft>
+                <a:spcPts val="0"/>
+              </a:spcAft>
+            </a:pPr>
+            <a:r>
+              <a:rPr sz="1000" b="0">
+                <a:solidFill>
+                  <a:srgbClr val="8A93A3"/>
+                </a:solidFill>
+                <a:latin typeface="Inter"/>
+              </a:rPr>
+              <a:t>benchmark.json, differential-tested</a:t>
+            </a:r>
+          </a:p>
+        </p:txBody>
+      </p:sp>
+      <p:sp>
+        <p:nvSpPr>
+          <p:cNvPr id="10" name="Rounded Rectangle 9"/>
+          <p:cNvSpPr/>
+          <p:nvPr/>
+        </p:nvSpPr>
+        <p:spPr>
+          <a:xfrm>
+            <a:off x="8961120" y="3474720"/>
+            <a:ext cx="2103120" cy="1097280"/>
+          </a:xfrm>
+          <a:prstGeom prst="roundRect">
+            <a:avLst/>
+          </a:prstGeom>
+          <a:solidFill>
+            <a:srgbClr val="111420"/>
+          </a:solidFill>
+          <a:ln w="15240">
+            <a:solidFill>
+              <a:srgbClr val="3A3F4E"/>
+            </a:solidFill>
+          </a:ln>
+          <a:effectLst/>
+        </p:spPr>
+        <p:style>
+          <a:lnRef idx="1">
+            <a:schemeClr val="accent1"/>
+          </a:lnRef>
+          <a:fillRef idx="3">
+            <a:schemeClr val="accent1"/>
+          </a:fillRef>
+          <a:effectRef idx="2">
+            <a:schemeClr val="accent1"/>
+          </a:effectRef>
+          <a:fontRef idx="minor">
+            <a:schemeClr val="lt1"/>
+          </a:fontRef>
+        </p:style>
+        <p:txBody>
+          <a:bodyPr rtlCol="0" anchor="ctr" wrap="square"/>
+          <a:lstStyle/>
+          <a:p>
+            <a:pPr algn="ctr">
+              <a:spcAft>
+                <a:spcPts val="200"/>
+              </a:spcAft>
+            </a:pPr>
+            <a:r>
+              <a:rPr sz="1300" b="1">
+                <a:solidFill>
+                  <a:srgbClr val="E8ECF4"/>
+                </a:solidFill>
+                <a:latin typeface="Inter"/>
+              </a:rPr>
+              <a:t>surfaces</a:t>
+            </a:r>
+          </a:p>
+          <a:p>
+            <a:pPr>
+              <a:spcAft>
+                <a:spcPts val="0"/>
+              </a:spcAft>
+            </a:pPr>
+            <a:r>
+              <a:rPr sz="1000" b="0">
+                <a:solidFill>
+                  <a:srgbClr val="8A93A3"/>
+                </a:solidFill>
+                <a:latin typeface="Inter"/>
+              </a:rPr>
+              <a:t>site · notebook · deck · this room</a:t>
+            </a:r>
+          </a:p>
+        </p:txBody>
+      </p:sp>
+      <p:cxnSp>
+        <p:nvCxnSpPr>
+          <p:cNvPr id="11" name="Connector 10"/>
+          <p:cNvCxnSpPr/>
+          <p:nvPr/>
+        </p:nvCxnSpPr>
+        <p:spPr>
+          <a:xfrm>
+            <a:off x="2926080" y="2651760"/>
+            <a:ext cx="548640" cy="411480"/>
+          </a:xfrm>
+          <a:prstGeom prst="line">
+            <a:avLst/>
+          </a:prstGeom>
+          <a:ln w="20320">
+            <a:solidFill>
+              <a:srgbClr val="828FFF"/>
+            </a:solidFill>
+            <a:tailEnd type="triangle" w="med" len="med"/>
+          </a:ln>
+        </p:spPr>
+        <p:style>
+          <a:lnRef idx="2">
+            <a:schemeClr val="accent1"/>
+          </a:lnRef>
+          <a:fillRef idx="0">
+            <a:schemeClr val="accent1"/>
+          </a:fillRef>
+          <a:effectRef idx="1">
+            <a:schemeClr val="accent1"/>
+          </a:effectRef>
+          <a:fontRef idx="minor">
+            <a:schemeClr val="tx1"/>
+          </a:fontRef>
+        </p:style>
+      </p:cxnSp>
+      <p:cxnSp>
+        <p:nvCxnSpPr>
+          <p:cNvPr id="12" name="Connector 11"/>
+          <p:cNvCxnSpPr/>
+          <p:nvPr/>
+        </p:nvCxnSpPr>
+        <p:spPr>
+          <a:xfrm flipV="1">
+            <a:off x="2926080" y="3429000"/>
+            <a:ext cx="548640" cy="411480"/>
+          </a:xfrm>
+          <a:prstGeom prst="line">
+            <a:avLst/>
+          </a:prstGeom>
+          <a:ln w="20320">
+            <a:solidFill>
+              <a:srgbClr val="828FFF"/>
+            </a:solidFill>
+            <a:tailEnd type="triangle" w="med" len="med"/>
+          </a:ln>
+        </p:spPr>
+        <p:style>
+          <a:lnRef idx="2">
+            <a:schemeClr val="accent1"/>
+          </a:lnRef>
+          <a:fillRef idx="0">
+            <a:schemeClr val="accent1"/>
+          </a:fillRef>
+          <a:effectRef idx="1">
+            <a:schemeClr val="accent1"/>
+          </a:effectRef>
+          <a:fontRef idx="minor">
+            <a:schemeClr val="tx1"/>
+          </a:fontRef>
+        </p:style>
+      </p:cxnSp>
+      <p:cxnSp>
+        <p:nvCxnSpPr>
+          <p:cNvPr id="13" name="Connector 12"/>
+          <p:cNvCxnSpPr/>
+          <p:nvPr/>
+        </p:nvCxnSpPr>
+        <p:spPr>
+          <a:xfrm>
+            <a:off x="5577840" y="3246120"/>
+            <a:ext cx="548640" cy="0"/>
+          </a:xfrm>
+          <a:prstGeom prst="line">
+            <a:avLst/>
+          </a:prstGeom>
+          <a:ln w="20320">
+            <a:solidFill>
+              <a:srgbClr val="828FFF"/>
+            </a:solidFill>
+            <a:tailEnd type="triangle" w="med" len="med"/>
+          </a:ln>
+        </p:spPr>
+        <p:style>
+          <a:lnRef idx="2">
+            <a:schemeClr val="accent1"/>
+          </a:lnRef>
+          <a:fillRef idx="0">
+            <a:schemeClr val="accent1"/>
+          </a:fillRef>
+          <a:effectRef idx="1">
+            <a:schemeClr val="accent1"/>
+          </a:effectRef>
+          <a:fontRef idx="minor">
+            <a:schemeClr val="tx1"/>
+          </a:fontRef>
+        </p:style>
+      </p:cxnSp>
+      <p:cxnSp>
+        <p:nvCxnSpPr>
+          <p:cNvPr id="14" name="Connector 13"/>
+          <p:cNvCxnSpPr/>
+          <p:nvPr/>
+        </p:nvCxnSpPr>
+        <p:spPr>
+          <a:xfrm flipH="1">
+            <a:off x="5669280" y="3703320"/>
+            <a:ext cx="1097280" cy="640080"/>
+          </a:xfrm>
+          <a:prstGeom prst="line">
+            <a:avLst/>
+          </a:prstGeom>
+          <a:ln w="20320">
+            <a:solidFill>
+              <a:srgbClr val="828FFF"/>
+            </a:solidFill>
+            <a:tailEnd type="triangle" w="med" len="med"/>
+          </a:ln>
+        </p:spPr>
+        <p:style>
+          <a:lnRef idx="2">
+            <a:schemeClr val="accent1"/>
+          </a:lnRef>
+          <a:fillRef idx="0">
+            <a:schemeClr val="accent1"/>
+          </a:fillRef>
+          <a:effectRef idx="1">
+            <a:schemeClr val="accent1"/>
+          </a:effectRef>
+          <a:fontRef idx="minor">
+            <a:schemeClr val="tx1"/>
+          </a:fontRef>
+        </p:style>
+      </p:cxnSp>
+      <p:cxnSp>
+        <p:nvCxnSpPr>
+          <p:cNvPr id="15" name="Connector 14"/>
+          <p:cNvCxnSpPr/>
+          <p:nvPr/>
+        </p:nvCxnSpPr>
+        <p:spPr>
+          <a:xfrm>
+            <a:off x="5577840" y="4754880"/>
+            <a:ext cx="548640" cy="0"/>
+          </a:xfrm>
+          <a:prstGeom prst="line">
+            <a:avLst/>
+          </a:prstGeom>
+          <a:ln w="20320">
+            <a:solidFill>
+              <a:srgbClr val="828FFF"/>
+            </a:solidFill>
+            <a:tailEnd type="triangle" w="med" len="med"/>
+          </a:ln>
+        </p:spPr>
+        <p:style>
+          <a:lnRef idx="2">
+            <a:schemeClr val="accent1"/>
+          </a:lnRef>
+          <a:fillRef idx="0">
+            <a:schemeClr val="accent1"/>
+          </a:fillRef>
+          <a:effectRef idx="1">
+            <a:schemeClr val="accent1"/>
+          </a:effectRef>
+          <a:fontRef idx="minor">
+            <a:schemeClr val="tx1"/>
+          </a:fontRef>
+        </p:style>
+      </p:cxnSp>
+      <p:cxnSp>
+        <p:nvCxnSpPr>
+          <p:cNvPr id="16" name="Connector 15"/>
+          <p:cNvCxnSpPr/>
+          <p:nvPr/>
+        </p:nvCxnSpPr>
+        <p:spPr>
+          <a:xfrm flipV="1">
+            <a:off x="8229600" y="4206240"/>
+            <a:ext cx="777240" cy="457200"/>
+          </a:xfrm>
+          <a:prstGeom prst="line">
+            <a:avLst/>
+          </a:prstGeom>
+          <a:ln w="20320">
+            <a:solidFill>
+              <a:srgbClr val="828FFF"/>
+            </a:solidFill>
+            <a:tailEnd type="triangle" w="med" len="med"/>
+          </a:ln>
+        </p:spPr>
+        <p:style>
+          <a:lnRef idx="2">
+            <a:schemeClr val="accent1"/>
+          </a:lnRef>
+          <a:fillRef idx="0">
+            <a:schemeClr val="accent1"/>
+          </a:fillRef>
+          <a:effectRef idx="1">
+            <a:schemeClr val="accent1"/>
+          </a:effectRef>
+          <a:fontRef idx="minor">
+            <a:schemeClr val="tx1"/>
+          </a:fontRef>
+        </p:style>
+      </p:cxnSp>
+      <p:cxnSp>
+        <p:nvCxnSpPr>
+          <p:cNvPr id="17" name="Connector 16"/>
+          <p:cNvCxnSpPr/>
+          <p:nvPr/>
+        </p:nvCxnSpPr>
+        <p:spPr>
+          <a:xfrm>
+            <a:off x="8229600" y="3154680"/>
+            <a:ext cx="777240" cy="502920"/>
+          </a:xfrm>
+          <a:prstGeom prst="line">
+            <a:avLst/>
+          </a:prstGeom>
+          <a:ln w="20320">
+            <a:solidFill>
+              <a:srgbClr val="828FFF"/>
+            </a:solidFill>
+            <a:tailEnd type="triangle" w="med" len="med"/>
+          </a:ln>
+        </p:spPr>
+        <p:style>
+          <a:lnRef idx="2">
+            <a:schemeClr val="accent1"/>
+          </a:lnRef>
+          <a:fillRef idx="0">
+            <a:schemeClr val="accent1"/>
+          </a:fillRef>
+          <a:effectRef idx="1">
+            <a:schemeClr val="accent1"/>
+          </a:effectRef>
+          <a:fontRef idx="minor">
+            <a:schemeClr val="tx1"/>
+          </a:fontRef>
+        </p:style>
+      </p:cxnSp>
+      <p:sp>
+        <p:nvSpPr>
+          <p:cNvPr id="18" name="TextBox 17"/>
+          <p:cNvSpPr txBox="1"/>
+          <p:nvPr/>
+        </p:nvSpPr>
+        <p:spPr>
+          <a:xfrm>
+            <a:off x="822960" y="5806440"/>
+            <a:ext cx="10515600" cy="914400"/>
+          </a:xfrm>
+          <a:prstGeom prst="rect">
+            <a:avLst/>
+          </a:prstGeom>
+          <a:noFill/>
+        </p:spPr>
+        <p:txBody>
+          <a:bodyPr wrap="square">
+            <a:spAutoFit/>
+          </a:bodyPr>
+          <a:lstStyle/>
+          <a:p>
+            <a:pPr>
+              <a:spcAft>
+                <a:spcPts val="600"/>
+              </a:spcAft>
+            </a:pPr>
+            <a:r>
+              <a:rPr sz="1300" b="0">
+                <a:solidFill>
+                  <a:srgbClr val="8A93A3"/>
+                </a:solidFill>
+                <a:latin typeface="Inter"/>
+              </a:rPr>
+              <a:t>The deck, the site, and the notebook all read the same export; the export mirrors the cost model exactly and a differential test proves it. No number on any surface has a second source.</a:t>
+            </a:r>
+          </a:p>
+        </p:txBody>
+      </p:sp>
+    </p:spTree>
+  </p:cSld>
+  <p:clrMapOvr>
+    <a:masterClrMapping/>
+  </p:clrMapOvr>
+</p:sld>
+</file>
+
 <file path=ppt/theme/theme1.xml><?xml version="1.0" encoding="utf-8"?>
 <a:theme xmlns:a="http://schemas.openxmlformats.org/drawingml/2006/main" name="Office Theme">
   <a:themeElements>

--- a/docs/assets/deck/verdict-bench.pptx
+++ b/docs/assets/deck/verdict-bench.pptx
@@ -8780,7 +8780,7 @@
                 </a:solidFill>
                 <a:latin typeface="Inter"/>
               </a:rPr>
-              <a:t>Expected loss, the actual model</a:t>
+              <a:t>How a mistake is priced</a:t>
             </a:r>
           </a:p>
         </p:txBody>
